--- a/outputs/GFCC24May2026_Eastertide.pptx
+++ b/outputs/GFCC24May2026_Eastertide.pptx
@@ -89,12 +89,6 @@
     <p:sldId id="337" r:id="rId88"/>
     <p:sldId id="338" r:id="rId89"/>
     <p:sldId id="339" r:id="rId90"/>
-    <p:sldId id="340" r:id="rId91"/>
-    <p:sldId id="341" r:id="rId92"/>
-    <p:sldId id="342" r:id="rId93"/>
-    <p:sldId id="343" r:id="rId94"/>
-    <p:sldId id="344" r:id="rId95"/>
-    <p:sldId id="345" r:id="rId96"/>
   </p:sldIdLst>
   <p:sldSz cx="18288000" cy="10287000" type="screen4x3"/>
   <p:notesSz cx="6858000" cy="9144000"/>
@@ -3504,7 +3498,7 @@
               </a:defRPr>
             </a:pPr>
             <a:r>
-              <a:t>Rev. Fr. Jonrey Lauron, RCJ</a:t>
+              <a:t>Rev.Fr. Jonrey Lauron, RCJ</a:t>
             </a:r>
           </a:p>
           <a:p>
@@ -6420,7 +6414,7 @@
               </a:defRPr>
             </a:pPr>
             <a:r>
-              <a:t>Celebrant: Rev. Fr. Jonrey Lauron, RCJ</a:t>
+              <a:t>Celebrant: Rev.Fr. Jonrey Lauron, RCJ</a:t>
             </a:r>
           </a:p>
           <a:p>
@@ -8178,7 +8172,7 @@
               </a:defRPr>
             </a:pPr>
             <a:r>
-              <a:t>Rev. Fr. Jonrey Lauron, RCJ</a:t>
+              <a:t>Rev.Fr. Jonrey Lauron, RCJ</a:t>
             </a:r>
           </a:p>
           <a:p>
@@ -9194,7 +9188,7 @@
               </a:defRPr>
             </a:pPr>
             <a:r>
-              <a:t>Rev. Fr. Jonrey Lauron, RCJ</a:t>
+              <a:t>Rev.Fr. Jonrey Lauron, RCJ</a:t>
             </a:r>
           </a:p>
           <a:p>
@@ -10160,7 +10154,7 @@
               </a:defRPr>
             </a:pPr>
             <a:r>
-              <a:t>Rev. Fr. Jonrey Lauron, RCJ</a:t>
+              <a:t>Rev.Fr. Jonrey Lauron, RCJ</a:t>
             </a:r>
           </a:p>
           <a:p>
@@ -14766,7 +14760,7 @@
               </a:defRPr>
             </a:pPr>
             <a:r>
-              <a:t>Rev. Fr. Jonrey Lauron, RCJ</a:t>
+              <a:t>Rev.Fr. Jonrey Lauron, RCJ</a:t>
             </a:r>
           </a:p>
           <a:p>
@@ -15305,7 +15299,7 @@
               </a:defRPr>
             </a:pPr>
             <a:r>
-              <a:t>Rev. Fr. Jonrey Lauron, RCJ</a:t>
+              <a:t>Rev.Fr. Jonrey Lauron, RCJ</a:t>
             </a:r>
           </a:p>
           <a:p>
@@ -16367,7 +16361,7 @@
               </a:defRPr>
             </a:pPr>
             <a:r>
-              <a:t>Rev. Fr. Jonrey Lauron, RCJ</a:t>
+              <a:t>Rev.Fr. Jonrey Lauron, RCJ</a:t>
             </a:r>
           </a:p>
           <a:p>
@@ -18727,7 +18721,7 @@
               </a:defRPr>
             </a:pPr>
             <a:r>
-              <a:t>Awit ng Paghahangad</a:t>
+              <a:t>Pananagutan</a:t>
             </a:r>
           </a:p>
         </p:txBody>
@@ -18769,64 +18763,7 @@
               </a:defRPr>
             </a:pPr>
             <a:r>
-              <a:t>OH DIYOS, IKAW ANG LAGING HANAP</a:t>
-            </a:r>
-          </a:p>
-          <a:p>
-            <a:pPr algn="ctr">
-              <a:lnSpc>
-                <a:spcPct val="105000"/>
-              </a:lnSpc>
-              <a:spcAft>
-                <a:spcPts val="1000"/>
-              </a:spcAft>
-              <a:defRPr sz="5500" b="1" i="0">
-                <a:solidFill>
-                  <a:srgbClr val="FFFFFF"/>
-                </a:solidFill>
-                <a:latin typeface="Arial Black"/>
-              </a:defRPr>
-            </a:pPr>
-            <a:r>
-              <a:t>LOOB KO'Y IKAW ANG TANGING HANGAD</a:t>
-            </a:r>
-          </a:p>
-          <a:p>
-            <a:pPr algn="ctr">
-              <a:lnSpc>
-                <a:spcPct val="105000"/>
-              </a:lnSpc>
-              <a:spcAft>
-                <a:spcPts val="1000"/>
-              </a:spcAft>
-              <a:defRPr sz="5500" b="1" i="0">
-                <a:solidFill>
-                  <a:srgbClr val="FFFFFF"/>
-                </a:solidFill>
-                <a:latin typeface="Arial Black"/>
-              </a:defRPr>
-            </a:pPr>
-            <a:r>
-              <a:t>NAUUHAW AKONG PARANG TIGANG NA LUPA</a:t>
-            </a:r>
-          </a:p>
-          <a:p>
-            <a:pPr algn="ctr">
-              <a:lnSpc>
-                <a:spcPct val="105000"/>
-              </a:lnSpc>
-              <a:spcAft>
-                <a:spcPts val="1000"/>
-              </a:spcAft>
-              <a:defRPr sz="5500" b="1" i="0">
-                <a:solidFill>
-                  <a:srgbClr val="FFFFFF"/>
-                </a:solidFill>
-                <a:latin typeface="Arial Black"/>
-              </a:defRPr>
-            </a:pPr>
-            <a:r>
-              <a:t>SA TUBIG NG 'YONG PAG-AARUGA</a:t>
+              <a:t>(NO LYRICS IN LIBRARY FOR THIS HYMN.)</a:t>
             </a:r>
           </a:p>
         </p:txBody>
@@ -18897,7 +18834,7 @@
     <p:bg>
       <p:bgPr>
         <a:solidFill>
-          <a:srgbClr val="000000"/>
+          <a:srgbClr val="211733"/>
         </a:solidFill>
         <a:effectLst/>
       </p:bgPr>
@@ -18977,74 +18914,71 @@
         </p:nvSpPr>
         <p:spPr>
           <a:xfrm>
-            <a:off x="0" y="1490472"/>
-            <a:ext cx="18288000" cy="7927848"/>
-          </a:xfrm>
-          <a:prstGeom prst="rect">
-            <a:avLst/>
-          </a:prstGeom>
-          <a:noFill/>
-        </p:spPr>
-        <p:txBody>
-          <a:bodyPr wrap="square" lIns="109728" rIns="109728" tIns="73152" bIns="73152" anchor="ctr">
-            <a:noAutofit/>
-          </a:bodyPr>
-          <a:lstStyle/>
-          <a:p>
-            <a:pPr algn="ctr">
-              <a:lnSpc>
-                <a:spcPct val="105000"/>
-              </a:lnSpc>
-              <a:spcAft>
-                <a:spcPts val="1000"/>
-              </a:spcAft>
-              <a:defRPr sz="5500" b="1" i="0">
-                <a:solidFill>
-                  <a:srgbClr val="FFFFFF"/>
-                </a:solidFill>
-                <a:latin typeface="Arial Black"/>
-              </a:defRPr>
-            </a:pPr>
-            <a:r>
-              <a:t>IKA'Y PAGMAMASDAN SA DAKONG BANAL</a:t>
-            </a:r>
-          </a:p>
-          <a:p>
-            <a:pPr algn="ctr">
-              <a:lnSpc>
-                <a:spcPct val="105000"/>
-              </a:lnSpc>
-              <a:spcAft>
-                <a:spcPts val="1000"/>
-              </a:spcAft>
-              <a:defRPr sz="5500" b="1" i="0">
-                <a:solidFill>
-                  <a:srgbClr val="FFFFFF"/>
-                </a:solidFill>
-                <a:latin typeface="Arial Black"/>
-              </a:defRPr>
-            </a:pPr>
-            <a:r>
-              <a:t>NANG MAKITA KO ANG 'YONG PAGKARANGAL</a:t>
-            </a:r>
-          </a:p>
-          <a:p>
-            <a:pPr algn="ctr">
-              <a:lnSpc>
-                <a:spcPct val="105000"/>
-              </a:lnSpc>
-              <a:spcAft>
-                <a:spcPts val="1000"/>
-              </a:spcAft>
-              <a:defRPr sz="5500" b="1" i="0">
-                <a:solidFill>
-                  <a:srgbClr val="FFFFFF"/>
-                </a:solidFill>
-                <a:latin typeface="Arial Black"/>
-              </a:defRPr>
-            </a:pPr>
-            <a:r>
-              <a:t>DADALANGIN AKONG NAKATAAS AKING KAMAY</a:t>
+            <a:off x="914400" y="1490472"/>
+            <a:ext cx="16459200" cy="7790688"/>
+          </a:xfrm>
+          <a:prstGeom prst="rect">
+            <a:avLst/>
+          </a:prstGeom>
+          <a:noFill/>
+        </p:spPr>
+        <p:txBody>
+          <a:bodyPr wrap="square" lIns="109728" rIns="109728" tIns="73152" bIns="73152">
+            <a:noAutofit/>
+          </a:bodyPr>
+          <a:lstStyle/>
+          <a:p>
+            <a:pPr algn="ctr">
+              <a:spcBef>
+                <a:spcPts val="400"/>
+              </a:spcBef>
+              <a:spcAft>
+                <a:spcPts val="500"/>
+              </a:spcAft>
+              <a:defRPr sz="2000" b="1" i="0">
+                <a:solidFill>
+                  <a:srgbClr val="D8B4FE"/>
+                </a:solidFill>
+                <a:latin typeface="Georgia"/>
+              </a:defRPr>
+            </a:pPr>
+            <a:r>
+              <a:t>Priest: Let us pray.</a:t>
+            </a:r>
+          </a:p>
+          <a:p>
+            <a:pPr algn="ctr">
+              <a:spcAft>
+                <a:spcPts val="500"/>
+              </a:spcAft>
+              <a:defRPr sz="1500" b="0" i="1">
+                <a:solidFill>
+                  <a:srgbClr val="D8B4FE"/>
+                </a:solidFill>
+                <a:latin typeface="Georgia"/>
+              </a:defRPr>
+            </a:pPr>
+            <a:r>
+              <a:t>The Priest says the Post- Communion Prayer for the day in full from the Roman Missal. The people respond at the end.</a:t>
+            </a:r>
+          </a:p>
+          <a:p>
+            <a:pPr algn="ctr">
+              <a:spcBef>
+                <a:spcPts val="400"/>
+              </a:spcBef>
+              <a:spcAft>
+                <a:spcPts val="500"/>
+              </a:spcAft>
+              <a:defRPr sz="2000" b="1" i="0">
+                <a:solidFill>
+                  <a:srgbClr val="FFFFFF"/>
+                </a:solidFill>
+                <a:latin typeface="Georgia"/>
+              </a:defRPr>
+            </a:pPr>
+            <a:r>
+              <a:t>All: Amen.</a:t>
             </a:r>
           </a:p>
         </p:txBody>
@@ -19074,7 +19008,7 @@
             <a:pPr>
               <a:defRPr sz="1300" b="1" i="0">
                 <a:solidFill>
-                  <a:srgbClr val="8C8C91"/>
+                  <a:srgbClr val="F8C66A"/>
                 </a:solidFill>
                 <a:latin typeface="Georgia"/>
               </a:defRPr>
@@ -19090,13 +19024,13 @@
               </a:spcBef>
               <a:defRPr sz="1200" b="0" i="0">
                 <a:solidFill>
-                  <a:srgbClr val="FFCC4D"/>
-                </a:solidFill>
-                <a:latin typeface="Georgia"/>
-              </a:defRPr>
-            </a:pPr>
-            <a:r>
-              <a:t>Communion (2)</a:t>
+                  <a:srgbClr val="D8B4FE"/>
+                </a:solidFill>
+                <a:latin typeface="Georgia"/>
+              </a:defRPr>
+            </a:pPr>
+            <a:r>
+              <a:t>The Communion Rite</a:t>
             </a:r>
           </a:p>
         </p:txBody>
@@ -19112,10 +19046,350 @@
 <file path=ppt/slides/slide67.xml><?xml version="1.0" encoding="utf-8"?>
 <p:sld xmlns:a="http://schemas.openxmlformats.org/drawingml/2006/main" xmlns:p="http://schemas.openxmlformats.org/presentationml/2006/main" xmlns:r="http://schemas.openxmlformats.org/officeDocument/2006/relationships">
   <p:cSld>
+    <p:spTree>
+      <p:nvGrpSpPr>
+        <p:cNvPr id="1" name=""/>
+        <p:cNvGrpSpPr/>
+        <p:nvPr/>
+      </p:nvGrpSpPr>
+      <p:grpSpPr/>
+      <p:pic>
+        <p:nvPicPr>
+          <p:cNvPr id="2" name="Picture 1" descr="GFCC24May2026_Eastertide_16x9.png"/>
+          <p:cNvPicPr>
+            <a:picLocks noChangeAspect="1"/>
+          </p:cNvPicPr>
+          <p:nvPr/>
+        </p:nvPicPr>
+        <p:blipFill>
+          <a:blip r:embed="rId2"/>
+          <a:stretch>
+            <a:fillRect/>
+          </a:stretch>
+        </p:blipFill>
+        <p:spPr>
+          <a:xfrm>
+            <a:off x="0" y="0"/>
+            <a:ext cx="18288000" cy="10287000"/>
+          </a:xfrm>
+          <a:prstGeom prst="rect">
+            <a:avLst/>
+          </a:prstGeom>
+        </p:spPr>
+      </p:pic>
+      <p:pic>
+        <p:nvPicPr>
+          <p:cNvPr id="3" name="Picture 2" descr="community_logo.png"/>
+          <p:cNvPicPr>
+            <a:picLocks noChangeAspect="1"/>
+          </p:cNvPicPr>
+          <p:nvPr/>
+        </p:nvPicPr>
+        <p:blipFill>
+          <a:blip r:embed="rId3"/>
+          <a:stretch>
+            <a:fillRect/>
+          </a:stretch>
+        </p:blipFill>
+        <p:spPr>
+          <a:xfrm>
+            <a:off x="914400" y="256032"/>
+            <a:ext cx="387682" cy="384048"/>
+          </a:xfrm>
+          <a:prstGeom prst="rect">
+            <a:avLst/>
+          </a:prstGeom>
+        </p:spPr>
+      </p:pic>
+      <p:sp>
+        <p:nvSpPr>
+          <p:cNvPr id="4" name="TextBox 3"/>
+          <p:cNvSpPr txBox="1"/>
+          <p:nvPr/>
+        </p:nvSpPr>
+        <p:spPr>
+          <a:xfrm>
+            <a:off x="1430098" y="256032"/>
+            <a:ext cx="15943502" cy="384048"/>
+          </a:xfrm>
+          <a:prstGeom prst="rect">
+            <a:avLst/>
+          </a:prstGeom>
+          <a:noFill/>
+        </p:spPr>
+        <p:txBody>
+          <a:bodyPr wrap="square" lIns="109728" rIns="109728" tIns="73152" bIns="73152" anchor="ctr">
+            <a:noAutofit/>
+          </a:bodyPr>
+          <a:lstStyle/>
+          <a:p>
+            <a:pPr algn="l">
+              <a:defRPr sz="1500" b="1" i="0">
+                <a:solidFill>
+                  <a:srgbClr val="FFFFFF"/>
+                </a:solidFill>
+                <a:latin typeface="Georgia"/>
+              </a:defRPr>
+            </a:pPr>
+            <a:r>
+              <a:t>Gwangju Filipino Catholic Community</a:t>
+            </a:r>
+          </a:p>
+        </p:txBody>
+      </p:sp>
+      <p:sp>
+        <p:nvSpPr>
+          <p:cNvPr id="5" name="TextBox 4"/>
+          <p:cNvSpPr txBox="1"/>
+          <p:nvPr/>
+        </p:nvSpPr>
+        <p:spPr>
+          <a:xfrm>
+            <a:off x="914400" y="1810512"/>
+            <a:ext cx="16459200" cy="5943600"/>
+          </a:xfrm>
+          <a:prstGeom prst="rect">
+            <a:avLst/>
+          </a:prstGeom>
+          <a:noFill/>
+        </p:spPr>
+        <p:txBody>
+          <a:bodyPr wrap="square" lIns="109728" rIns="109728" tIns="73152" bIns="73152">
+            <a:noAutofit/>
+          </a:bodyPr>
+          <a:lstStyle/>
+          <a:p>
+            <a:pPr>
+              <a:spcAft>
+                <a:spcPts val="300"/>
+              </a:spcAft>
+              <a:defRPr sz="2100" b="1" i="0">
+                <a:solidFill>
+                  <a:srgbClr val="D8B4FE"/>
+                </a:solidFill>
+                <a:latin typeface="Georgia"/>
+              </a:defRPr>
+            </a:pPr>
+            <a:r>
+              <a:t>MASS CELEBRANT:</a:t>
+            </a:r>
+          </a:p>
+          <a:p>
+            <a:pPr>
+              <a:spcAft>
+                <a:spcPts val="300"/>
+              </a:spcAft>
+              <a:defRPr sz="2100" b="0" i="0">
+                <a:solidFill>
+                  <a:srgbClr val="FFFFFF"/>
+                </a:solidFill>
+                <a:latin typeface="Georgia"/>
+              </a:defRPr>
+            </a:pPr>
+            <a:r>
+              <a:t>Rev.Fr. Jonrey Lauron, RCJ</a:t>
+            </a:r>
+          </a:p>
+          <a:p>
+            <a:pPr>
+              <a:spcAft>
+                <a:spcPts val="300"/>
+              </a:spcAft>
+              <a:defRPr sz="2100" b="0" i="0">
+                <a:solidFill>
+                  <a:srgbClr val="FFFFFF"/>
+                </a:solidFill>
+                <a:latin typeface="Georgia"/>
+              </a:defRPr>
+            </a:pPr>
+          </a:p>
+          <a:p>
+            <a:pPr>
+              <a:spcAft>
+                <a:spcPts val="300"/>
+              </a:spcAft>
+              <a:defRPr sz="2100" b="0" i="0">
+                <a:solidFill>
+                  <a:srgbClr val="FFFFFF"/>
+                </a:solidFill>
+                <a:latin typeface="Georgia"/>
+              </a:defRPr>
+            </a:pPr>
+            <a:r>
+              <a:t>Gwangju</a:t>
+            </a:r>
+            <a:br/>
+            <a:r>
+              <a:t>Filipino</a:t>
+            </a:r>
+            <a:br/>
+            <a:r>
+              <a:t>Catholic</a:t>
+            </a:r>
+            <a:br/>
+            <a:r>
+              <a:t>Community</a:t>
+            </a:r>
+          </a:p>
+          <a:p>
+            <a:pPr>
+              <a:spcAft>
+                <a:spcPts val="300"/>
+              </a:spcAft>
+              <a:defRPr sz="2100" b="0" i="0">
+                <a:solidFill>
+                  <a:srgbClr val="FFFFFF"/>
+                </a:solidFill>
+                <a:latin typeface="Georgia"/>
+              </a:defRPr>
+            </a:pPr>
+          </a:p>
+          <a:p>
+            <a:pPr>
+              <a:spcAft>
+                <a:spcPts val="300"/>
+              </a:spcAft>
+              <a:defRPr sz="2100" b="0" i="0">
+                <a:solidFill>
+                  <a:srgbClr val="FFFFFF"/>
+                </a:solidFill>
+                <a:latin typeface="Georgia"/>
+              </a:defRPr>
+            </a:pPr>
+            <a:r>
+              <a:t>Gospel (John 20:19-23)</a:t>
+            </a:r>
+          </a:p>
+          <a:p>
+            <a:pPr>
+              <a:spcAft>
+                <a:spcPts val="300"/>
+              </a:spcAft>
+              <a:defRPr sz="2100" b="0" i="0">
+                <a:solidFill>
+                  <a:srgbClr val="FFFFFF"/>
+                </a:solidFill>
+                <a:latin typeface="Georgia"/>
+              </a:defRPr>
+            </a:pPr>
+            <a:r>
+              <a:t>“Receive the Holy Spirit!”</a:t>
+            </a:r>
+          </a:p>
+          <a:p>
+            <a:pPr>
+              <a:spcAft>
+                <a:spcPts val="300"/>
+              </a:spcAft>
+              <a:defRPr sz="2100" b="0" i="0">
+                <a:solidFill>
+                  <a:srgbClr val="FFFFFF"/>
+                </a:solidFill>
+                <a:latin typeface="Georgia"/>
+              </a:defRPr>
+            </a:pPr>
+          </a:p>
+          <a:p>
+            <a:pPr>
+              <a:spcAft>
+                <a:spcPts val="300"/>
+              </a:spcAft>
+              <a:defRPr sz="2100" b="0" i="0">
+                <a:solidFill>
+                  <a:srgbClr val="FFFFFF"/>
+                </a:solidFill>
+                <a:latin typeface="Georgia"/>
+              </a:defRPr>
+            </a:pPr>
+            <a:r>
+              <a:t>YEAR A</a:t>
+            </a:r>
+          </a:p>
+          <a:p>
+            <a:pPr>
+              <a:spcAft>
+                <a:spcPts val="300"/>
+              </a:spcAft>
+              <a:defRPr sz="2100" b="0" i="0">
+                <a:solidFill>
+                  <a:srgbClr val="FFFFFF"/>
+                </a:solidFill>
+                <a:latin typeface="Georgia"/>
+              </a:defRPr>
+            </a:pPr>
+            <a:r>
+              <a:t>2026-05-24 · Eastertide</a:t>
+            </a:r>
+          </a:p>
+        </p:txBody>
+      </p:sp>
+      <p:sp>
+        <p:nvSpPr>
+          <p:cNvPr id="6" name="TextBox 5"/>
+          <p:cNvSpPr txBox="1"/>
+          <p:nvPr/>
+        </p:nvSpPr>
+        <p:spPr>
+          <a:xfrm>
+            <a:off x="914400" y="9418320"/>
+            <a:ext cx="16459200" cy="777240"/>
+          </a:xfrm>
+          <a:prstGeom prst="rect">
+            <a:avLst/>
+          </a:prstGeom>
+          <a:noFill/>
+        </p:spPr>
+        <p:txBody>
+          <a:bodyPr wrap="square" lIns="109728" rIns="109728" tIns="73152" bIns="73152">
+            <a:noAutofit/>
+          </a:bodyPr>
+          <a:lstStyle/>
+          <a:p>
+            <a:pPr>
+              <a:defRPr sz="1300" b="1" i="0">
+                <a:solidFill>
+                  <a:srgbClr val="F8C66A"/>
+                </a:solidFill>
+                <a:latin typeface="Georgia"/>
+              </a:defRPr>
+            </a:pPr>
+            <a:r>
+              <a:t>Gwangju Filipino Catholic Community</a:t>
+            </a:r>
+          </a:p>
+          <a:p>
+            <a:pPr>
+              <a:spcBef>
+                <a:spcPts val="200"/>
+              </a:spcBef>
+              <a:defRPr sz="1200" b="0" i="0">
+                <a:solidFill>
+                  <a:srgbClr val="D8B4FE"/>
+                </a:solidFill>
+                <a:latin typeface="Georgia"/>
+              </a:defRPr>
+            </a:pPr>
+            <a:r>
+              <a:t>Mass poster / divider</a:t>
+            </a:r>
+          </a:p>
+        </p:txBody>
+      </p:sp>
+    </p:spTree>
+  </p:cSld>
+  <p:clrMapOvr>
+    <a:masterClrMapping/>
+  </p:clrMapOvr>
+</p:sld>
+</file>
+
+<file path=ppt/slides/slide68.xml><?xml version="1.0" encoding="utf-8"?>
+<p:sld xmlns:a="http://schemas.openxmlformats.org/drawingml/2006/main" xmlns:p="http://schemas.openxmlformats.org/presentationml/2006/main" xmlns:r="http://schemas.openxmlformats.org/officeDocument/2006/relationships">
+  <p:cSld>
     <p:bg>
       <p:bgPr>
         <a:solidFill>
-          <a:srgbClr val="000000"/>
+          <a:srgbClr val="211733"/>
         </a:solidFill>
         <a:effectLst/>
       </p:bgPr>
@@ -19195,74 +19469,65 @@
         </p:nvSpPr>
         <p:spPr>
           <a:xfrm>
-            <a:off x="0" y="1490472"/>
-            <a:ext cx="18288000" cy="7927848"/>
-          </a:xfrm>
-          <a:prstGeom prst="rect">
-            <a:avLst/>
-          </a:prstGeom>
-          <a:noFill/>
-        </p:spPr>
-        <p:txBody>
-          <a:bodyPr wrap="square" lIns="109728" rIns="109728" tIns="73152" bIns="73152" anchor="ctr">
-            <a:noAutofit/>
-          </a:bodyPr>
-          <a:lstStyle/>
-          <a:p>
-            <a:pPr algn="ctr">
-              <a:lnSpc>
-                <a:spcPct val="105000"/>
-              </a:lnSpc>
-              <a:spcAft>
-                <a:spcPts val="1000"/>
-              </a:spcAft>
-              <a:defRPr sz="5500" b="1" i="0">
-                <a:solidFill>
-                  <a:srgbClr val="FFFFFF"/>
-                </a:solidFill>
-                <a:latin typeface="Arial Black"/>
-              </a:defRPr>
-            </a:pPr>
-            <a:r>
-              <a:t>MAGAGALAK NA AAWIT NG PAPURING IAALAY</a:t>
-            </a:r>
-          </a:p>
-          <a:p>
-            <a:pPr algn="ctr">
-              <a:lnSpc>
-                <a:spcPct val="105000"/>
-              </a:lnSpc>
-              <a:spcAft>
-                <a:spcPts val="1000"/>
-              </a:spcAft>
-              <a:defRPr sz="5500" b="1" i="0">
-                <a:solidFill>
-                  <a:srgbClr val="FFFFFF"/>
-                </a:solidFill>
-                <a:latin typeface="Arial Black"/>
-              </a:defRPr>
-            </a:pPr>
-            <a:r>
-              <a:t>GUNITA KO'Y IKAW HABANG NAHIHIMLAY</a:t>
-            </a:r>
-          </a:p>
-          <a:p>
-            <a:pPr algn="ctr">
-              <a:lnSpc>
-                <a:spcPct val="105000"/>
-              </a:lnSpc>
-              <a:spcAft>
-                <a:spcPts val="1000"/>
-              </a:spcAft>
-              <a:defRPr sz="5500" b="1" i="0">
-                <a:solidFill>
-                  <a:srgbClr val="FFFFFF"/>
-                </a:solidFill>
-                <a:latin typeface="Arial Black"/>
-              </a:defRPr>
-            </a:pPr>
-            <a:r>
-              <a:t>PAGKAT ANG TULONG MO SA TUWINA'Y TAGLAY</a:t>
+            <a:off x="914400" y="1490472"/>
+            <a:ext cx="16459200" cy="7790688"/>
+          </a:xfrm>
+          <a:prstGeom prst="rect">
+            <a:avLst/>
+          </a:prstGeom>
+          <a:noFill/>
+        </p:spPr>
+        <p:txBody>
+          <a:bodyPr wrap="square" lIns="109728" rIns="109728" tIns="73152" bIns="73152">
+            <a:noAutofit/>
+          </a:bodyPr>
+          <a:lstStyle/>
+          <a:p>
+            <a:pPr algn="ctr">
+              <a:spcAft>
+                <a:spcPts val="500"/>
+              </a:spcAft>
+              <a:defRPr sz="1900" b="1" i="0">
+                <a:solidFill>
+                  <a:srgbClr val="FFFFFF"/>
+                </a:solidFill>
+                <a:latin typeface="Georgia"/>
+              </a:defRPr>
+            </a:pPr>
+            <a:r>
+              <a:t>MASS COLLECTION</a:t>
+            </a:r>
+          </a:p>
+          <a:p>
+            <a:pPr algn="ctr">
+              <a:spcAft>
+                <a:spcPts val="500"/>
+              </a:spcAft>
+              <a:defRPr sz="1500" b="0" i="1">
+                <a:solidFill>
+                  <a:srgbClr val="D8B4FE"/>
+                </a:solidFill>
+                <a:latin typeface="Georgia"/>
+              </a:defRPr>
+            </a:pPr>
+            <a:r>
+              <a:t>Thank you for your generosity.</a:t>
+            </a:r>
+          </a:p>
+          <a:p>
+            <a:pPr algn="ctr">
+              <a:spcAft>
+                <a:spcPts val="500"/>
+              </a:spcAft>
+              <a:defRPr sz="1500" b="0" i="1">
+                <a:solidFill>
+                  <a:srgbClr val="D8B4FE"/>
+                </a:solidFill>
+                <a:latin typeface="Georgia"/>
+              </a:defRPr>
+            </a:pPr>
+            <a:r>
+              <a:t>Date: Sunday, May 17, 2026</a:t>
             </a:r>
           </a:p>
         </p:txBody>
@@ -19292,7 +19557,7 @@
             <a:pPr>
               <a:defRPr sz="1300" b="1" i="0">
                 <a:solidFill>
-                  <a:srgbClr val="8C8C91"/>
+                  <a:srgbClr val="F8C66A"/>
                 </a:solidFill>
                 <a:latin typeface="Georgia"/>
               </a:defRPr>
@@ -19308,13 +19573,13 @@
               </a:spcBef>
               <a:defRPr sz="1200" b="0" i="0">
                 <a:solidFill>
-                  <a:srgbClr val="FFCC4D"/>
-                </a:solidFill>
-                <a:latin typeface="Georgia"/>
-              </a:defRPr>
-            </a:pPr>
-            <a:r>
-              <a:t>Communion (2)</a:t>
+                  <a:srgbClr val="D8B4FE"/>
+                </a:solidFill>
+                <a:latin typeface="Georgia"/>
+              </a:defRPr>
+            </a:pPr>
+            <a:r>
+              <a:t>Mass Collection</a:t>
             </a:r>
           </a:p>
         </p:txBody>
@@ -19327,13 +19592,13 @@
 </p:sld>
 </file>
 
-<file path=ppt/slides/slide68.xml><?xml version="1.0" encoding="utf-8"?>
+<file path=ppt/slides/slide69.xml><?xml version="1.0" encoding="utf-8"?>
 <p:sld xmlns:a="http://schemas.openxmlformats.org/drawingml/2006/main" xmlns:p="http://schemas.openxmlformats.org/presentationml/2006/main" xmlns:r="http://schemas.openxmlformats.org/officeDocument/2006/relationships">
   <p:cSld>
     <p:bg>
       <p:bgPr>
         <a:solidFill>
-          <a:srgbClr val="000000"/>
+          <a:srgbClr val="211733"/>
         </a:solidFill>
         <a:effectLst/>
       </p:bgPr>
@@ -19413,74 +19678,65 @@
         </p:nvSpPr>
         <p:spPr>
           <a:xfrm>
-            <a:off x="0" y="1490472"/>
-            <a:ext cx="18288000" cy="7927848"/>
-          </a:xfrm>
-          <a:prstGeom prst="rect">
-            <a:avLst/>
-          </a:prstGeom>
-          <a:noFill/>
-        </p:spPr>
-        <p:txBody>
-          <a:bodyPr wrap="square" lIns="109728" rIns="109728" tIns="73152" bIns="73152" anchor="ctr">
-            <a:noAutofit/>
-          </a:bodyPr>
-          <a:lstStyle/>
-          <a:p>
-            <a:pPr algn="ctr">
-              <a:lnSpc>
-                <a:spcPct val="105000"/>
-              </a:lnSpc>
-              <a:spcAft>
-                <a:spcPts val="1000"/>
-              </a:spcAft>
-              <a:defRPr sz="5500" b="1" i="0">
-                <a:solidFill>
-                  <a:srgbClr val="FFFFFF"/>
-                </a:solidFill>
-                <a:latin typeface="Arial Black"/>
-              </a:defRPr>
-            </a:pPr>
-            <a:r>
-              <a:t>SA LILIM NG IYONG MGA PAKPAK</a:t>
-            </a:r>
-          </a:p>
-          <a:p>
-            <a:pPr algn="ctr">
-              <a:lnSpc>
-                <a:spcPct val="105000"/>
-              </a:lnSpc>
-              <a:spcAft>
-                <a:spcPts val="1000"/>
-              </a:spcAft>
-              <a:defRPr sz="5500" b="1" i="0">
-                <a:solidFill>
-                  <a:srgbClr val="FFFFFF"/>
-                </a:solidFill>
-                <a:latin typeface="Arial Black"/>
-              </a:defRPr>
-            </a:pPr>
-            <a:r>
-              <a:t>UMAAWIT AKONG BUONG GALAK</a:t>
-            </a:r>
-          </a:p>
-          <a:p>
-            <a:pPr algn="ctr">
-              <a:lnSpc>
-                <a:spcPct val="105000"/>
-              </a:lnSpc>
-              <a:spcAft>
-                <a:spcPts val="1000"/>
-              </a:spcAft>
-              <a:defRPr sz="5500" b="1" i="0">
-                <a:solidFill>
-                  <a:srgbClr val="FFFFFF"/>
-                </a:solidFill>
-                <a:latin typeface="Arial Black"/>
-              </a:defRPr>
-            </a:pPr>
-            <a:r>
-              <a:t>AKING KALULUWA'Y KUMAKAPIT SA 'YO</a:t>
+            <a:off x="914400" y="1490472"/>
+            <a:ext cx="16459200" cy="7790688"/>
+          </a:xfrm>
+          <a:prstGeom prst="rect">
+            <a:avLst/>
+          </a:prstGeom>
+          <a:noFill/>
+        </p:spPr>
+        <p:txBody>
+          <a:bodyPr wrap="square" lIns="109728" rIns="109728" tIns="73152" bIns="73152">
+            <a:noAutofit/>
+          </a:bodyPr>
+          <a:lstStyle/>
+          <a:p>
+            <a:pPr algn="ctr">
+              <a:spcAft>
+                <a:spcPts val="500"/>
+              </a:spcAft>
+              <a:defRPr sz="1900" b="1" i="0">
+                <a:solidFill>
+                  <a:srgbClr val="FFFFFF"/>
+                </a:solidFill>
+                <a:latin typeface="Georgia"/>
+              </a:defRPr>
+            </a:pPr>
+            <a:r>
+              <a:t>FOOD SPONSORS</a:t>
+            </a:r>
+          </a:p>
+          <a:p>
+            <a:pPr algn="ctr">
+              <a:spcAft>
+                <a:spcPts val="500"/>
+              </a:spcAft>
+              <a:defRPr sz="1500" b="0" i="1">
+                <a:solidFill>
+                  <a:srgbClr val="D8B4FE"/>
+                </a:solidFill>
+                <a:latin typeface="Georgia"/>
+              </a:defRPr>
+            </a:pPr>
+            <a:r>
+              <a:t>The community thanks our food sponsors.</a:t>
+            </a:r>
+          </a:p>
+          <a:p>
+            <a:pPr algn="ctr">
+              <a:spcAft>
+                <a:spcPts val="500"/>
+              </a:spcAft>
+              <a:defRPr sz="1500" b="0" i="1">
+                <a:solidFill>
+                  <a:srgbClr val="D8B4FE"/>
+                </a:solidFill>
+                <a:latin typeface="Georgia"/>
+              </a:defRPr>
+            </a:pPr>
+            <a:r>
+              <a:t>(No sponsors listed — add names in Mass Builder.)</a:t>
             </a:r>
           </a:p>
         </p:txBody>
@@ -19510,7 +19766,7 @@
             <a:pPr>
               <a:defRPr sz="1300" b="1" i="0">
                 <a:solidFill>
-                  <a:srgbClr val="8C8C91"/>
+                  <a:srgbClr val="F8C66A"/>
                 </a:solidFill>
                 <a:latin typeface="Georgia"/>
               </a:defRPr>
@@ -19526,231 +19782,13 @@
               </a:spcBef>
               <a:defRPr sz="1200" b="0" i="0">
                 <a:solidFill>
-                  <a:srgbClr val="FFCC4D"/>
-                </a:solidFill>
-                <a:latin typeface="Georgia"/>
-              </a:defRPr>
-            </a:pPr>
-            <a:r>
-              <a:t>Communion (2)</a:t>
-            </a:r>
-          </a:p>
-        </p:txBody>
-      </p:sp>
-    </p:spTree>
-  </p:cSld>
-  <p:clrMapOvr>
-    <a:masterClrMapping/>
-  </p:clrMapOvr>
-</p:sld>
-</file>
-
-<file path=ppt/slides/slide69.xml><?xml version="1.0" encoding="utf-8"?>
-<p:sld xmlns:a="http://schemas.openxmlformats.org/drawingml/2006/main" xmlns:p="http://schemas.openxmlformats.org/presentationml/2006/main" xmlns:r="http://schemas.openxmlformats.org/officeDocument/2006/relationships">
-  <p:cSld>
-    <p:bg>
-      <p:bgPr>
-        <a:solidFill>
-          <a:srgbClr val="000000"/>
-        </a:solidFill>
-        <a:effectLst/>
-      </p:bgPr>
-    </p:bg>
-    <p:spTree>
-      <p:nvGrpSpPr>
-        <p:cNvPr id="1" name=""/>
-        <p:cNvGrpSpPr/>
-        <p:nvPr/>
-      </p:nvGrpSpPr>
-      <p:grpSpPr/>
-      <p:pic>
-        <p:nvPicPr>
-          <p:cNvPr id="2" name="Picture 1" descr="community_logo.png"/>
-          <p:cNvPicPr>
-            <a:picLocks noChangeAspect="1"/>
-          </p:cNvPicPr>
-          <p:nvPr/>
-        </p:nvPicPr>
-        <p:blipFill>
-          <a:blip r:embed="rId2"/>
-          <a:stretch>
-            <a:fillRect/>
-          </a:stretch>
-        </p:blipFill>
-        <p:spPr>
-          <a:xfrm>
-            <a:off x="914400" y="256032"/>
-            <a:ext cx="387682" cy="384048"/>
-          </a:xfrm>
-          <a:prstGeom prst="rect">
-            <a:avLst/>
-          </a:prstGeom>
-        </p:spPr>
-      </p:pic>
-      <p:sp>
-        <p:nvSpPr>
-          <p:cNvPr id="3" name="TextBox 2"/>
-          <p:cNvSpPr txBox="1"/>
-          <p:nvPr/>
-        </p:nvSpPr>
-        <p:spPr>
-          <a:xfrm>
-            <a:off x="1430098" y="256032"/>
-            <a:ext cx="15943502" cy="384048"/>
-          </a:xfrm>
-          <a:prstGeom prst="rect">
-            <a:avLst/>
-          </a:prstGeom>
-          <a:noFill/>
-        </p:spPr>
-        <p:txBody>
-          <a:bodyPr wrap="square" lIns="109728" rIns="109728" tIns="73152" bIns="73152" anchor="ctr">
-            <a:noAutofit/>
-          </a:bodyPr>
-          <a:lstStyle/>
-          <a:p>
-            <a:pPr algn="l">
-              <a:defRPr sz="1500" b="1" i="0">
-                <a:solidFill>
-                  <a:srgbClr val="FFFFFF"/>
-                </a:solidFill>
-                <a:latin typeface="Georgia"/>
-              </a:defRPr>
-            </a:pPr>
-            <a:r>
-              <a:t>Gwangju Filipino Catholic Community</a:t>
-            </a:r>
-          </a:p>
-        </p:txBody>
-      </p:sp>
-      <p:sp>
-        <p:nvSpPr>
-          <p:cNvPr id="4" name="TextBox 3"/>
-          <p:cNvSpPr txBox="1"/>
-          <p:nvPr/>
-        </p:nvSpPr>
-        <p:spPr>
-          <a:xfrm>
-            <a:off x="0" y="1490472"/>
-            <a:ext cx="18288000" cy="7927848"/>
-          </a:xfrm>
-          <a:prstGeom prst="rect">
-            <a:avLst/>
-          </a:prstGeom>
-          <a:noFill/>
-        </p:spPr>
-        <p:txBody>
-          <a:bodyPr wrap="square" lIns="109728" rIns="109728" tIns="73152" bIns="73152" anchor="ctr">
-            <a:noAutofit/>
-          </a:bodyPr>
-          <a:lstStyle/>
-          <a:p>
-            <a:pPr algn="ctr">
-              <a:lnSpc>
-                <a:spcPct val="105000"/>
-              </a:lnSpc>
-              <a:spcAft>
-                <a:spcPts val="1000"/>
-              </a:spcAft>
-              <a:defRPr sz="5000" b="1" i="0">
-                <a:solidFill>
-                  <a:srgbClr val="FFFFFF"/>
-                </a:solidFill>
-                <a:latin typeface="Arial Black"/>
-              </a:defRPr>
-            </a:pPr>
-            <a:r>
-              <a:t>KALIGTASA'Y T'YAK KONG HAWAK MO AKO</a:t>
-            </a:r>
-          </a:p>
-          <a:p>
-            <a:pPr algn="ctr">
-              <a:lnSpc>
-                <a:spcPct val="105000"/>
-              </a:lnSpc>
-              <a:spcAft>
-                <a:spcPts val="1000"/>
-              </a:spcAft>
-              <a:defRPr sz="5000" b="1" i="0">
-                <a:solidFill>
-                  <a:srgbClr val="FFFFFF"/>
-                </a:solidFill>
-                <a:latin typeface="Arial Black"/>
-              </a:defRPr>
-            </a:pPr>
-            <a:r>
-              <a:t>MAGDIRIWANG ANG HARI ANG DIYOS S'YANG DAHILAN</a:t>
-            </a:r>
-          </a:p>
-          <a:p>
-            <a:pPr algn="ctr">
-              <a:lnSpc>
-                <a:spcPct val="105000"/>
-              </a:lnSpc>
-              <a:spcAft>
-                <a:spcPts val="1000"/>
-              </a:spcAft>
-              <a:defRPr sz="5000" b="1" i="0">
-                <a:solidFill>
-                  <a:srgbClr val="FFFFFF"/>
-                </a:solidFill>
-                <a:latin typeface="Arial Black"/>
-              </a:defRPr>
-            </a:pPr>
-            <a:r>
-              <a:t>ANG SA IYO AY NANGAKONG GALAK YAONG MAKAKAMTAN</a:t>
-            </a:r>
-          </a:p>
-        </p:txBody>
-      </p:sp>
-      <p:sp>
-        <p:nvSpPr>
-          <p:cNvPr id="5" name="TextBox 4"/>
-          <p:cNvSpPr txBox="1"/>
-          <p:nvPr/>
-        </p:nvSpPr>
-        <p:spPr>
-          <a:xfrm>
-            <a:off x="914400" y="9418320"/>
-            <a:ext cx="16459200" cy="777240"/>
-          </a:xfrm>
-          <a:prstGeom prst="rect">
-            <a:avLst/>
-          </a:prstGeom>
-          <a:noFill/>
-        </p:spPr>
-        <p:txBody>
-          <a:bodyPr wrap="square" lIns="109728" rIns="109728" tIns="73152" bIns="73152">
-            <a:noAutofit/>
-          </a:bodyPr>
-          <a:lstStyle/>
-          <a:p>
-            <a:pPr>
-              <a:defRPr sz="1300" b="1" i="0">
-                <a:solidFill>
-                  <a:srgbClr val="8C8C91"/>
-                </a:solidFill>
-                <a:latin typeface="Georgia"/>
-              </a:defRPr>
-            </a:pPr>
-            <a:r>
-              <a:t>Gwangju Filipino Catholic Community</a:t>
-            </a:r>
-          </a:p>
-          <a:p>
-            <a:pPr>
-              <a:spcBef>
-                <a:spcPts val="200"/>
-              </a:spcBef>
-              <a:defRPr sz="1200" b="0" i="0">
-                <a:solidFill>
-                  <a:srgbClr val="FFCC4D"/>
-                </a:solidFill>
-                <a:latin typeface="Georgia"/>
-              </a:defRPr>
-            </a:pPr>
-            <a:r>
-              <a:t>Communion (2)</a:t>
+                  <a:srgbClr val="D8B4FE"/>
+                </a:solidFill>
+                <a:latin typeface="Georgia"/>
+              </a:defRPr>
+            </a:pPr>
+            <a:r>
+              <a:t>Food Sponsors</a:t>
             </a:r>
           </a:p>
         </p:txBody>
@@ -19987,7 +20025,7 @@
     <p:bg>
       <p:bgPr>
         <a:solidFill>
-          <a:srgbClr val="000000"/>
+          <a:srgbClr val="211733"/>
         </a:solidFill>
         <a:effectLst/>
       </p:bgPr>
@@ -20067,93 +20105,49 @@
         </p:nvSpPr>
         <p:spPr>
           <a:xfrm>
-            <a:off x="0" y="1490472"/>
-            <a:ext cx="18288000" cy="7927848"/>
-          </a:xfrm>
-          <a:prstGeom prst="rect">
-            <a:avLst/>
-          </a:prstGeom>
-          <a:noFill/>
-        </p:spPr>
-        <p:txBody>
-          <a:bodyPr wrap="square" lIns="109728" rIns="109728" tIns="73152" bIns="73152" anchor="ctr">
-            <a:noAutofit/>
-          </a:bodyPr>
-          <a:lstStyle/>
-          <a:p>
-            <a:pPr algn="ctr">
-              <a:lnSpc>
-                <a:spcPct val="105000"/>
-              </a:lnSpc>
-              <a:spcAft>
-                <a:spcPts val="1000"/>
-              </a:spcAft>
-              <a:defRPr sz="5500" b="1" i="0">
-                <a:solidFill>
-                  <a:srgbClr val="FFFFFF"/>
-                </a:solidFill>
-                <a:latin typeface="Arial Black"/>
-              </a:defRPr>
-            </a:pPr>
-            <a:r>
-              <a:t>GUNITA KO'Y IKAW HABANG NAHIHIMLAY</a:t>
-            </a:r>
-          </a:p>
-          <a:p>
-            <a:pPr algn="ctr">
-              <a:lnSpc>
-                <a:spcPct val="105000"/>
-              </a:lnSpc>
-              <a:spcAft>
-                <a:spcPts val="1000"/>
-              </a:spcAft>
-              <a:defRPr sz="5500" b="1" i="0">
-                <a:solidFill>
-                  <a:srgbClr val="FFFFFF"/>
-                </a:solidFill>
-                <a:latin typeface="Arial Black"/>
-              </a:defRPr>
-            </a:pPr>
-            <a:r>
-              <a:t>PAGKAT ANG TULONG MO SA TUWINA'Y TAGLAY</a:t>
-            </a:r>
-          </a:p>
-          <a:p>
-            <a:pPr algn="ctr">
-              <a:lnSpc>
-                <a:spcPct val="105000"/>
-              </a:lnSpc>
-              <a:spcAft>
-                <a:spcPts val="1000"/>
-              </a:spcAft>
-              <a:defRPr sz="5500" b="1" i="0">
-                <a:solidFill>
-                  <a:srgbClr val="FFFFFF"/>
-                </a:solidFill>
-                <a:latin typeface="Arial Black"/>
-              </a:defRPr>
-            </a:pPr>
-            <a:r>
-              <a:t>SA LILIM NG IYONG MGA PAKPAK</a:t>
-            </a:r>
-          </a:p>
-          <a:p>
-            <a:pPr algn="ctr">
-              <a:lnSpc>
-                <a:spcPct val="105000"/>
-              </a:lnSpc>
-              <a:spcAft>
-                <a:spcPts val="1000"/>
-              </a:spcAft>
-              <a:defRPr sz="5500" b="1" i="0">
-                <a:solidFill>
-                  <a:srgbClr val="FFFFFF"/>
-                </a:solidFill>
-                <a:latin typeface="Arial Black"/>
-              </a:defRPr>
-            </a:pPr>
-            <a:r>
-              <a:t>UMAAWIT AKONG BUONG GALAK</a:t>
+            <a:off x="914400" y="1490472"/>
+            <a:ext cx="16459200" cy="7790688"/>
+          </a:xfrm>
+          <a:prstGeom prst="rect">
+            <a:avLst/>
+          </a:prstGeom>
+          <a:noFill/>
+        </p:spPr>
+        <p:txBody>
+          <a:bodyPr wrap="square" lIns="109728" rIns="109728" tIns="73152" bIns="73152">
+            <a:noAutofit/>
+          </a:bodyPr>
+          <a:lstStyle/>
+          <a:p>
+            <a:pPr algn="ctr">
+              <a:spcAft>
+                <a:spcPts val="500"/>
+              </a:spcAft>
+              <a:defRPr sz="1900" b="1" i="0">
+                <a:solidFill>
+                  <a:srgbClr val="FFFFFF"/>
+                </a:solidFill>
+                <a:latin typeface="Georgia"/>
+              </a:defRPr>
+            </a:pPr>
+            <a:r>
+              <a:t>CHURCH ANNOUNCEMENTS</a:t>
+            </a:r>
+          </a:p>
+          <a:p>
+            <a:pPr algn="ctr">
+              <a:spcAft>
+                <a:spcPts val="500"/>
+              </a:spcAft>
+              <a:defRPr sz="1500" b="0" i="1">
+                <a:solidFill>
+                  <a:srgbClr val="D8B4FE"/>
+                </a:solidFill>
+                <a:latin typeface="Georgia"/>
+              </a:defRPr>
+            </a:pPr>
+            <a:r>
+              <a:t>Insert bulletin points with complete sentences on the following slides or edit this deck.</a:t>
             </a:r>
           </a:p>
         </p:txBody>
@@ -20183,7 +20177,7 @@
             <a:pPr>
               <a:defRPr sz="1300" b="1" i="0">
                 <a:solidFill>
-                  <a:srgbClr val="8C8C91"/>
+                  <a:srgbClr val="F8C66A"/>
                 </a:solidFill>
                 <a:latin typeface="Georgia"/>
               </a:defRPr>
@@ -20199,13 +20193,13 @@
               </a:spcBef>
               <a:defRPr sz="1200" b="0" i="0">
                 <a:solidFill>
-                  <a:srgbClr val="FFCC4D"/>
-                </a:solidFill>
-                <a:latin typeface="Georgia"/>
-              </a:defRPr>
-            </a:pPr>
-            <a:r>
-              <a:t>Communion (2)</a:t>
+                  <a:srgbClr val="D8B4FE"/>
+                </a:solidFill>
+                <a:latin typeface="Georgia"/>
+              </a:defRPr>
+            </a:pPr>
+            <a:r>
+              <a:t>Announcements</a:t>
             </a:r>
           </a:p>
         </p:txBody>
@@ -20224,7 +20218,7 @@
     <p:bg>
       <p:bgPr>
         <a:solidFill>
-          <a:srgbClr val="000000"/>
+          <a:srgbClr val="211733"/>
         </a:solidFill>
         <a:effectLst/>
       </p:bgPr>
@@ -20304,55 +20298,49 @@
         </p:nvSpPr>
         <p:spPr>
           <a:xfrm>
-            <a:off x="0" y="1490472"/>
-            <a:ext cx="18288000" cy="7927848"/>
-          </a:xfrm>
-          <a:prstGeom prst="rect">
-            <a:avLst/>
-          </a:prstGeom>
-          <a:noFill/>
-        </p:spPr>
-        <p:txBody>
-          <a:bodyPr wrap="square" lIns="109728" rIns="109728" tIns="73152" bIns="73152" anchor="ctr">
-            <a:noAutofit/>
-          </a:bodyPr>
-          <a:lstStyle/>
-          <a:p>
-            <a:pPr algn="ctr">
-              <a:lnSpc>
-                <a:spcPct val="105000"/>
-              </a:lnSpc>
-              <a:spcAft>
-                <a:spcPts val="1000"/>
-              </a:spcAft>
-              <a:defRPr sz="5500" b="1" i="0">
-                <a:solidFill>
-                  <a:srgbClr val="FFFFFF"/>
-                </a:solidFill>
-                <a:latin typeface="Arial Black"/>
-              </a:defRPr>
-            </a:pPr>
-            <a:r>
-              <a:t>UMAAWIT, UMAAWIT</a:t>
-            </a:r>
-          </a:p>
-          <a:p>
-            <a:pPr algn="ctr">
-              <a:lnSpc>
-                <a:spcPct val="105000"/>
-              </a:lnSpc>
-              <a:spcAft>
-                <a:spcPts val="1000"/>
-              </a:spcAft>
-              <a:defRPr sz="5500" b="1" i="0">
-                <a:solidFill>
-                  <a:srgbClr val="FFFFFF"/>
-                </a:solidFill>
-                <a:latin typeface="Arial Black"/>
-              </a:defRPr>
-            </a:pPr>
-            <a:r>
-              <a:t>UMAAWIT AKONG BUONG GALAK</a:t>
+            <a:off x="914400" y="1490472"/>
+            <a:ext cx="16459200" cy="7790688"/>
+          </a:xfrm>
+          <a:prstGeom prst="rect">
+            <a:avLst/>
+          </a:prstGeom>
+          <a:noFill/>
+        </p:spPr>
+        <p:txBody>
+          <a:bodyPr wrap="square" lIns="109728" rIns="109728" tIns="73152" bIns="73152">
+            <a:noAutofit/>
+          </a:bodyPr>
+          <a:lstStyle/>
+          <a:p>
+            <a:pPr algn="ctr">
+              <a:spcAft>
+                <a:spcPts val="500"/>
+              </a:spcAft>
+              <a:defRPr sz="1900" b="1" i="0">
+                <a:solidFill>
+                  <a:srgbClr val="FFFFFF"/>
+                </a:solidFill>
+                <a:latin typeface="Georgia"/>
+              </a:defRPr>
+            </a:pPr>
+            <a:r>
+              <a:t>Welcome newcomers!</a:t>
+            </a:r>
+          </a:p>
+          <a:p>
+            <a:pPr algn="ctr">
+              <a:spcAft>
+                <a:spcPts val="500"/>
+              </a:spcAft>
+              <a:defRPr sz="1500" b="0" i="1">
+                <a:solidFill>
+                  <a:srgbClr val="D8B4FE"/>
+                </a:solidFill>
+                <a:latin typeface="Georgia"/>
+              </a:defRPr>
+            </a:pPr>
+            <a:r>
+              <a:t>Photo collage optional.</a:t>
             </a:r>
           </a:p>
         </p:txBody>
@@ -20382,7 +20370,7 @@
             <a:pPr>
               <a:defRPr sz="1300" b="1" i="0">
                 <a:solidFill>
-                  <a:srgbClr val="8C8C91"/>
+                  <a:srgbClr val="F8C66A"/>
                 </a:solidFill>
                 <a:latin typeface="Georgia"/>
               </a:defRPr>
@@ -20398,13 +20386,13 @@
               </a:spcBef>
               <a:defRPr sz="1200" b="0" i="0">
                 <a:solidFill>
-                  <a:srgbClr val="FFCC4D"/>
-                </a:solidFill>
-                <a:latin typeface="Georgia"/>
-              </a:defRPr>
-            </a:pPr>
-            <a:r>
-              <a:t>Communion (2)</a:t>
+                  <a:srgbClr val="D8B4FE"/>
+                </a:solidFill>
+                <a:latin typeface="Georgia"/>
+              </a:defRPr>
+            </a:pPr>
+            <a:r>
+              <a:t>Announcements</a:t>
             </a:r>
           </a:p>
         </p:txBody>
@@ -20518,13 +20506,26 @@
           <a:lstStyle/>
           <a:p>
             <a:pPr algn="ctr">
-              <a:spcBef>
-                <a:spcPts val="400"/>
-              </a:spcBef>
               <a:spcAft>
                 <a:spcPts val="500"/>
               </a:spcAft>
-              <a:defRPr sz="2000" b="1" i="0">
+              <a:defRPr sz="1900" b="1" i="0">
+                <a:solidFill>
+                  <a:srgbClr val="FFFFFF"/>
+                </a:solidFill>
+                <a:latin typeface="Georgia"/>
+              </a:defRPr>
+            </a:pPr>
+            <a:r>
+              <a:t>Sacrament of Confession</a:t>
+            </a:r>
+          </a:p>
+          <a:p>
+            <a:pPr algn="ctr">
+              <a:spcAft>
+                <a:spcPts val="500"/>
+              </a:spcAft>
+              <a:defRPr sz="1500" b="0" i="1">
                 <a:solidFill>
                   <a:srgbClr val="D8B4FE"/>
                 </a:solidFill>
@@ -20532,42 +20533,7 @@
               </a:defRPr>
             </a:pPr>
             <a:r>
-              <a:t>Priest: Let us pray.</a:t>
-            </a:r>
-          </a:p>
-          <a:p>
-            <a:pPr algn="ctr">
-              <a:spcAft>
-                <a:spcPts val="500"/>
-              </a:spcAft>
-              <a:defRPr sz="1500" b="0" i="1">
-                <a:solidFill>
-                  <a:srgbClr val="D8B4FE"/>
-                </a:solidFill>
-                <a:latin typeface="Georgia"/>
-              </a:defRPr>
-            </a:pPr>
-            <a:r>
-              <a:t>The Priest says the Post- Communion Prayer for the day in full from the Roman Missal. The people respond at the end.</a:t>
-            </a:r>
-          </a:p>
-          <a:p>
-            <a:pPr algn="ctr">
-              <a:spcBef>
-                <a:spcPts val="400"/>
-              </a:spcBef>
-              <a:spcAft>
-                <a:spcPts val="500"/>
-              </a:spcAft>
-              <a:defRPr sz="2000" b="1" i="0">
-                <a:solidFill>
-                  <a:srgbClr val="FFFFFF"/>
-                </a:solidFill>
-                <a:latin typeface="Georgia"/>
-              </a:defRPr>
-            </a:pPr>
-            <a:r>
-              <a:t>All: Amen.</a:t>
+              <a:t>The Lord never tires of forgiving us; we are the ones who tire of seeking his mercy. — Pope Francis</a:t>
             </a:r>
           </a:p>
         </p:txBody>
@@ -20619,7 +20585,7 @@
               </a:defRPr>
             </a:pPr>
             <a:r>
-              <a:t>The Communion Rite</a:t>
+              <a:t>Announcements</a:t>
             </a:r>
           </a:p>
         </p:txBody>
@@ -20635,6 +20601,14 @@
 <file path=ppt/slides/slide73.xml><?xml version="1.0" encoding="utf-8"?>
 <p:sld xmlns:a="http://schemas.openxmlformats.org/drawingml/2006/main" xmlns:p="http://schemas.openxmlformats.org/presentationml/2006/main" xmlns:r="http://schemas.openxmlformats.org/officeDocument/2006/relationships">
   <p:cSld>
+    <p:bg>
+      <p:bgPr>
+        <a:solidFill>
+          <a:srgbClr val="211733"/>
+        </a:solidFill>
+        <a:effectLst/>
+      </p:bgPr>
+    </p:bg>
     <p:spTree>
       <p:nvGrpSpPr>
         <p:cNvPr id="1" name=""/>
@@ -20644,7 +20618,7 @@
       <p:grpSpPr/>
       <p:pic>
         <p:nvPicPr>
-          <p:cNvPr id="2" name="Picture 1" descr="GFCC24May2026_Eastertide_16x9.png"/>
+          <p:cNvPr id="2" name="Picture 1" descr="community_logo.png"/>
           <p:cNvPicPr>
             <a:picLocks noChangeAspect="1"/>
           </p:cNvPicPr>
@@ -20658,30 +20632,6 @@
         </p:blipFill>
         <p:spPr>
           <a:xfrm>
-            <a:off x="0" y="0"/>
-            <a:ext cx="18288000" cy="10287000"/>
-          </a:xfrm>
-          <a:prstGeom prst="rect">
-            <a:avLst/>
-          </a:prstGeom>
-        </p:spPr>
-      </p:pic>
-      <p:pic>
-        <p:nvPicPr>
-          <p:cNvPr id="3" name="Picture 2" descr="community_logo.png"/>
-          <p:cNvPicPr>
-            <a:picLocks noChangeAspect="1"/>
-          </p:cNvPicPr>
-          <p:nvPr/>
-        </p:nvPicPr>
-        <p:blipFill>
-          <a:blip r:embed="rId3"/>
-          <a:stretch>
-            <a:fillRect/>
-          </a:stretch>
-        </p:blipFill>
-        <p:spPr>
-          <a:xfrm>
             <a:off x="914400" y="256032"/>
             <a:ext cx="387682" cy="384048"/>
           </a:xfrm>
@@ -20692,7 +20642,7 @@
       </p:pic>
       <p:sp>
         <p:nvSpPr>
-          <p:cNvPr id="4" name="TextBox 3"/>
+          <p:cNvPr id="3" name="TextBox 2"/>
           <p:cNvSpPr txBox="1"/>
           <p:nvPr/>
         </p:nvSpPr>
@@ -20728,193 +20678,62 @@
       </p:sp>
       <p:sp>
         <p:nvSpPr>
+          <p:cNvPr id="4" name="TextBox 3"/>
+          <p:cNvSpPr txBox="1"/>
+          <p:nvPr/>
+        </p:nvSpPr>
+        <p:spPr>
+          <a:xfrm>
+            <a:off x="914400" y="1490472"/>
+            <a:ext cx="16459200" cy="7790688"/>
+          </a:xfrm>
+          <a:prstGeom prst="rect">
+            <a:avLst/>
+          </a:prstGeom>
+          <a:noFill/>
+        </p:spPr>
+        <p:txBody>
+          <a:bodyPr wrap="square" lIns="109728" rIns="109728" tIns="73152" bIns="73152">
+            <a:noAutofit/>
+          </a:bodyPr>
+          <a:lstStyle/>
+          <a:p>
+            <a:pPr algn="ctr">
+              <a:spcAft>
+                <a:spcPts val="500"/>
+              </a:spcAft>
+              <a:defRPr sz="1900" b="1" i="0">
+                <a:solidFill>
+                  <a:srgbClr val="FFFFFF"/>
+                </a:solidFill>
+                <a:latin typeface="Georgia"/>
+              </a:defRPr>
+            </a:pPr>
+            <a:r>
+              <a:t>Updates and Announcements</a:t>
+            </a:r>
+          </a:p>
+          <a:p>
+            <a:pPr algn="ctr">
+              <a:spcAft>
+                <a:spcPts val="500"/>
+              </a:spcAft>
+              <a:defRPr sz="1500" b="0" i="1">
+                <a:solidFill>
+                  <a:srgbClr val="D8B4FE"/>
+                </a:solidFill>
+                <a:latin typeface="Georgia"/>
+              </a:defRPr>
+            </a:pPr>
+            <a:r>
+              <a:t>Name your community page and invitation to follow in full; add a QR code to the slide master if you wish.</a:t>
+            </a:r>
+          </a:p>
+        </p:txBody>
+      </p:sp>
+      <p:sp>
+        <p:nvSpPr>
           <p:cNvPr id="5" name="TextBox 4"/>
-          <p:cNvSpPr txBox="1"/>
-          <p:nvPr/>
-        </p:nvSpPr>
-        <p:spPr>
-          <a:xfrm>
-            <a:off x="914400" y="1810512"/>
-            <a:ext cx="16459200" cy="5943600"/>
-          </a:xfrm>
-          <a:prstGeom prst="rect">
-            <a:avLst/>
-          </a:prstGeom>
-          <a:noFill/>
-        </p:spPr>
-        <p:txBody>
-          <a:bodyPr wrap="square" lIns="109728" rIns="109728" tIns="73152" bIns="73152">
-            <a:noAutofit/>
-          </a:bodyPr>
-          <a:lstStyle/>
-          <a:p>
-            <a:pPr>
-              <a:spcAft>
-                <a:spcPts val="300"/>
-              </a:spcAft>
-              <a:defRPr sz="2100" b="1" i="0">
-                <a:solidFill>
-                  <a:srgbClr val="D8B4FE"/>
-                </a:solidFill>
-                <a:latin typeface="Georgia"/>
-              </a:defRPr>
-            </a:pPr>
-            <a:r>
-              <a:t>MASS CELEBRANT:</a:t>
-            </a:r>
-          </a:p>
-          <a:p>
-            <a:pPr>
-              <a:spcAft>
-                <a:spcPts val="300"/>
-              </a:spcAft>
-              <a:defRPr sz="2100" b="0" i="0">
-                <a:solidFill>
-                  <a:srgbClr val="FFFFFF"/>
-                </a:solidFill>
-                <a:latin typeface="Georgia"/>
-              </a:defRPr>
-            </a:pPr>
-            <a:r>
-              <a:t>Rev. Fr. Jonrey Lauron, RCJ</a:t>
-            </a:r>
-          </a:p>
-          <a:p>
-            <a:pPr>
-              <a:spcAft>
-                <a:spcPts val="300"/>
-              </a:spcAft>
-              <a:defRPr sz="2100" b="0" i="0">
-                <a:solidFill>
-                  <a:srgbClr val="FFFFFF"/>
-                </a:solidFill>
-                <a:latin typeface="Georgia"/>
-              </a:defRPr>
-            </a:pPr>
-          </a:p>
-          <a:p>
-            <a:pPr>
-              <a:spcAft>
-                <a:spcPts val="300"/>
-              </a:spcAft>
-              <a:defRPr sz="2100" b="0" i="0">
-                <a:solidFill>
-                  <a:srgbClr val="FFFFFF"/>
-                </a:solidFill>
-                <a:latin typeface="Georgia"/>
-              </a:defRPr>
-            </a:pPr>
-            <a:r>
-              <a:t>Gwangju</a:t>
-            </a:r>
-            <a:br/>
-            <a:r>
-              <a:t>Filipino</a:t>
-            </a:r>
-            <a:br/>
-            <a:r>
-              <a:t>Catholic</a:t>
-            </a:r>
-            <a:br/>
-            <a:r>
-              <a:t>Community</a:t>
-            </a:r>
-          </a:p>
-          <a:p>
-            <a:pPr>
-              <a:spcAft>
-                <a:spcPts val="300"/>
-              </a:spcAft>
-              <a:defRPr sz="2100" b="0" i="0">
-                <a:solidFill>
-                  <a:srgbClr val="FFFFFF"/>
-                </a:solidFill>
-                <a:latin typeface="Georgia"/>
-              </a:defRPr>
-            </a:pPr>
-          </a:p>
-          <a:p>
-            <a:pPr>
-              <a:spcAft>
-                <a:spcPts val="300"/>
-              </a:spcAft>
-              <a:defRPr sz="2100" b="0" i="0">
-                <a:solidFill>
-                  <a:srgbClr val="FFFFFF"/>
-                </a:solidFill>
-                <a:latin typeface="Georgia"/>
-              </a:defRPr>
-            </a:pPr>
-            <a:r>
-              <a:t>Gospel (John 20:19-23)</a:t>
-            </a:r>
-          </a:p>
-          <a:p>
-            <a:pPr>
-              <a:spcAft>
-                <a:spcPts val="300"/>
-              </a:spcAft>
-              <a:defRPr sz="2100" b="0" i="0">
-                <a:solidFill>
-                  <a:srgbClr val="FFFFFF"/>
-                </a:solidFill>
-                <a:latin typeface="Georgia"/>
-              </a:defRPr>
-            </a:pPr>
-            <a:r>
-              <a:t>“Receive the Holy Spirit!”</a:t>
-            </a:r>
-          </a:p>
-          <a:p>
-            <a:pPr>
-              <a:spcAft>
-                <a:spcPts val="300"/>
-              </a:spcAft>
-              <a:defRPr sz="2100" b="0" i="0">
-                <a:solidFill>
-                  <a:srgbClr val="FFFFFF"/>
-                </a:solidFill>
-                <a:latin typeface="Georgia"/>
-              </a:defRPr>
-            </a:pPr>
-          </a:p>
-          <a:p>
-            <a:pPr>
-              <a:spcAft>
-                <a:spcPts val="300"/>
-              </a:spcAft>
-              <a:defRPr sz="2100" b="0" i="0">
-                <a:solidFill>
-                  <a:srgbClr val="FFFFFF"/>
-                </a:solidFill>
-                <a:latin typeface="Georgia"/>
-              </a:defRPr>
-            </a:pPr>
-            <a:r>
-              <a:t>YEAR A</a:t>
-            </a:r>
-          </a:p>
-          <a:p>
-            <a:pPr>
-              <a:spcAft>
-                <a:spcPts val="300"/>
-              </a:spcAft>
-              <a:defRPr sz="2100" b="0" i="0">
-                <a:solidFill>
-                  <a:srgbClr val="FFFFFF"/>
-                </a:solidFill>
-                <a:latin typeface="Georgia"/>
-              </a:defRPr>
-            </a:pPr>
-            <a:r>
-              <a:t>2026-05-24 · Eastertide</a:t>
-            </a:r>
-          </a:p>
-        </p:txBody>
-      </p:sp>
-      <p:sp>
-        <p:nvSpPr>
-          <p:cNvPr id="6" name="TextBox 5"/>
           <p:cNvSpPr txBox="1"/>
           <p:nvPr/>
         </p:nvSpPr>
@@ -20959,7 +20778,7 @@
               </a:defRPr>
             </a:pPr>
             <a:r>
-              <a:t>Mass poster / divider</a:t>
+              <a:t>Announcements</a:t>
             </a:r>
           </a:p>
         </p:txBody>
@@ -21073,26 +20892,51 @@
           <a:lstStyle/>
           <a:p>
             <a:pPr algn="ctr">
+              <a:spcBef>
+                <a:spcPts val="400"/>
+              </a:spcBef>
               <a:spcAft>
                 <a:spcPts val="500"/>
               </a:spcAft>
-              <a:defRPr sz="1900" b="1" i="0">
-                <a:solidFill>
-                  <a:srgbClr val="FFFFFF"/>
-                </a:solidFill>
-                <a:latin typeface="Georgia"/>
-              </a:defRPr>
-            </a:pPr>
-            <a:r>
-              <a:t>MASS COLLECTION</a:t>
-            </a:r>
-          </a:p>
-          <a:p>
-            <a:pPr algn="ctr">
+              <a:defRPr sz="2000" b="1" i="0">
+                <a:solidFill>
+                  <a:srgbClr val="D8B4FE"/>
+                </a:solidFill>
+                <a:latin typeface="Georgia"/>
+              </a:defRPr>
+            </a:pPr>
+            <a:r>
+              <a:t>Priest: The Lord be with you.</a:t>
+            </a:r>
+          </a:p>
+          <a:p>
+            <a:pPr algn="ctr">
+              <a:spcBef>
+                <a:spcPts val="400"/>
+              </a:spcBef>
               <a:spcAft>
                 <a:spcPts val="500"/>
               </a:spcAft>
-              <a:defRPr sz="1500" b="0" i="1">
+              <a:defRPr sz="2000" b="1" i="0">
+                <a:solidFill>
+                  <a:srgbClr val="FFFFFF"/>
+                </a:solidFill>
+                <a:latin typeface="Georgia"/>
+              </a:defRPr>
+            </a:pPr>
+            <a:r>
+              <a:t>All: And with your spirit.</a:t>
+            </a:r>
+          </a:p>
+          <a:p>
+            <a:pPr algn="ctr">
+              <a:spcBef>
+                <a:spcPts val="400"/>
+              </a:spcBef>
+              <a:spcAft>
+                <a:spcPts val="500"/>
+              </a:spcAft>
+              <a:defRPr sz="2000" b="1" i="0">
                 <a:solidFill>
                   <a:srgbClr val="D8B4FE"/>
                 </a:solidFill>
@@ -21100,15 +20944,37 @@
               </a:defRPr>
             </a:pPr>
             <a:r>
-              <a:t>Thank you for your generosity.</a:t>
-            </a:r>
-          </a:p>
-          <a:p>
-            <a:pPr algn="ctr">
+              <a:t>Priest: May almighty God bless you, the Father, and the Son, and the Holy Spirit.</a:t>
+            </a:r>
+          </a:p>
+          <a:p>
+            <a:pPr algn="ctr">
+              <a:spcBef>
+                <a:spcPts val="400"/>
+              </a:spcBef>
               <a:spcAft>
                 <a:spcPts val="500"/>
               </a:spcAft>
-              <a:defRPr sz="1500" b="0" i="1">
+              <a:defRPr sz="2000" b="1" i="0">
+                <a:solidFill>
+                  <a:srgbClr val="FFFFFF"/>
+                </a:solidFill>
+                <a:latin typeface="Georgia"/>
+              </a:defRPr>
+            </a:pPr>
+            <a:r>
+              <a:t>All: Amen.</a:t>
+            </a:r>
+          </a:p>
+          <a:p>
+            <a:pPr algn="ctr">
+              <a:spcBef>
+                <a:spcPts val="400"/>
+              </a:spcBef>
+              <a:spcAft>
+                <a:spcPts val="500"/>
+              </a:spcAft>
+              <a:defRPr sz="2000" b="1" i="0">
                 <a:solidFill>
                   <a:srgbClr val="D8B4FE"/>
                 </a:solidFill>
@@ -21116,7 +20982,26 @@
               </a:defRPr>
             </a:pPr>
             <a:r>
-              <a:t>Date: Sunday, May 17, 2026</a:t>
+              <a:t>Priest: Go in peace, glorifying the Lord by your life.</a:t>
+            </a:r>
+          </a:p>
+          <a:p>
+            <a:pPr algn="ctr">
+              <a:spcBef>
+                <a:spcPts val="400"/>
+              </a:spcBef>
+              <a:spcAft>
+                <a:spcPts val="500"/>
+              </a:spcAft>
+              <a:defRPr sz="2000" b="1" i="0">
+                <a:solidFill>
+                  <a:srgbClr val="FFFFFF"/>
+                </a:solidFill>
+                <a:latin typeface="Georgia"/>
+              </a:defRPr>
+            </a:pPr>
+            <a:r>
+              <a:t>All: Thanks be to God.</a:t>
             </a:r>
           </a:p>
         </p:txBody>
@@ -21168,7 +21053,7 @@
               </a:defRPr>
             </a:pPr>
             <a:r>
-              <a:t>Mass Collection</a:t>
+              <a:t>Final Blessing</a:t>
             </a:r>
           </a:p>
         </p:txBody>
@@ -21187,7 +21072,7 @@
     <p:bg>
       <p:bgPr>
         <a:solidFill>
-          <a:srgbClr val="211733"/>
+          <a:srgbClr val="000000"/>
         </a:solidFill>
         <a:effectLst/>
       </p:bgPr>
@@ -21268,7 +21153,7 @@
         <p:spPr>
           <a:xfrm>
             <a:off x="914400" y="1490472"/>
-            <a:ext cx="16459200" cy="7790688"/>
+            <a:ext cx="16459200" cy="868680"/>
           </a:xfrm>
           <a:prstGeom prst="rect">
             <a:avLst/>
@@ -21282,50 +21167,15 @@
           <a:lstStyle/>
           <a:p>
             <a:pPr algn="ctr">
-              <a:spcAft>
-                <a:spcPts val="500"/>
-              </a:spcAft>
-              <a:defRPr sz="1900" b="1" i="0">
-                <a:solidFill>
-                  <a:srgbClr val="FFFFFF"/>
-                </a:solidFill>
-                <a:latin typeface="Georgia"/>
-              </a:defRPr>
-            </a:pPr>
-            <a:r>
-              <a:t>FOOD SPONSORS</a:t>
-            </a:r>
-          </a:p>
-          <a:p>
-            <a:pPr algn="ctr">
-              <a:spcAft>
-                <a:spcPts val="500"/>
-              </a:spcAft>
-              <a:defRPr sz="1500" b="0" i="1">
-                <a:solidFill>
-                  <a:srgbClr val="D8B4FE"/>
-                </a:solidFill>
-                <a:latin typeface="Georgia"/>
-              </a:defRPr>
-            </a:pPr>
-            <a:r>
-              <a:t>The community thanks our food sponsors.</a:t>
-            </a:r>
-          </a:p>
-          <a:p>
-            <a:pPr algn="ctr">
-              <a:spcAft>
-                <a:spcPts val="500"/>
-              </a:spcAft>
-              <a:defRPr sz="1500" b="0" i="1">
-                <a:solidFill>
-                  <a:srgbClr val="D8B4FE"/>
-                </a:solidFill>
-                <a:latin typeface="Georgia"/>
-              </a:defRPr>
-            </a:pPr>
-            <a:r>
-              <a:t>(No sponsors listed — add names in Mass Builder.)</a:t>
+              <a:defRPr sz="3800" b="1" i="0">
+                <a:solidFill>
+                  <a:srgbClr val="FFCC4D"/>
+                </a:solidFill>
+                <a:latin typeface="Georgia"/>
+              </a:defRPr>
+            </a:pPr>
+            <a:r>
+              <a:t>Go Make a Difference</a:t>
             </a:r>
           </a:p>
         </p:txBody>
@@ -21333,6 +21183,86 @@
       <p:sp>
         <p:nvSpPr>
           <p:cNvPr id="5" name="TextBox 4"/>
+          <p:cNvSpPr txBox="1"/>
+          <p:nvPr/>
+        </p:nvSpPr>
+        <p:spPr>
+          <a:xfrm>
+            <a:off x="0" y="2587752"/>
+            <a:ext cx="18288000" cy="6830568"/>
+          </a:xfrm>
+          <a:prstGeom prst="rect">
+            <a:avLst/>
+          </a:prstGeom>
+          <a:noFill/>
+        </p:spPr>
+        <p:txBody>
+          <a:bodyPr wrap="square" lIns="109728" rIns="109728" tIns="73152" bIns="73152" anchor="ctr">
+            <a:noAutofit/>
+          </a:bodyPr>
+          <a:lstStyle/>
+          <a:p>
+            <a:pPr algn="ctr">
+              <a:lnSpc>
+                <a:spcPct val="105000"/>
+              </a:lnSpc>
+              <a:spcAft>
+                <a:spcPts val="1000"/>
+              </a:spcAft>
+              <a:defRPr sz="5500" b="1" i="0">
+                <a:solidFill>
+                  <a:srgbClr val="FFFFFF"/>
+                </a:solidFill>
+                <a:latin typeface="Arial Black"/>
+              </a:defRPr>
+            </a:pPr>
+            <a:r>
+              <a:t>GO MAKE A DIFFERENCE;</a:t>
+            </a:r>
+          </a:p>
+          <a:p>
+            <a:pPr algn="ctr">
+              <a:lnSpc>
+                <a:spcPct val="105000"/>
+              </a:lnSpc>
+              <a:spcAft>
+                <a:spcPts val="1000"/>
+              </a:spcAft>
+              <a:defRPr sz="5500" b="1" i="0">
+                <a:solidFill>
+                  <a:srgbClr val="FFFFFF"/>
+                </a:solidFill>
+                <a:latin typeface="Arial Black"/>
+              </a:defRPr>
+            </a:pPr>
+            <a:r>
+              <a:t>WE CAN MAKE A DIFFERENCE</a:t>
+            </a:r>
+          </a:p>
+          <a:p>
+            <a:pPr algn="ctr">
+              <a:lnSpc>
+                <a:spcPct val="105000"/>
+              </a:lnSpc>
+              <a:spcAft>
+                <a:spcPts val="1000"/>
+              </a:spcAft>
+              <a:defRPr sz="5500" b="1" i="0">
+                <a:solidFill>
+                  <a:srgbClr val="FFFFFF"/>
+                </a:solidFill>
+                <a:latin typeface="Arial Black"/>
+              </a:defRPr>
+            </a:pPr>
+            <a:r>
+              <a:t>IN THE NAME OF THE LORD.</a:t>
+            </a:r>
+          </a:p>
+        </p:txBody>
+      </p:sp>
+      <p:sp>
+        <p:nvSpPr>
+          <p:cNvPr id="6" name="TextBox 5"/>
           <p:cNvSpPr txBox="1"/>
           <p:nvPr/>
         </p:nvSpPr>
@@ -21355,7 +21285,7 @@
             <a:pPr>
               <a:defRPr sz="1300" b="1" i="0">
                 <a:solidFill>
-                  <a:srgbClr val="F8C66A"/>
+                  <a:srgbClr val="8C8C91"/>
                 </a:solidFill>
                 <a:latin typeface="Georgia"/>
               </a:defRPr>
@@ -21371,13 +21301,13 @@
               </a:spcBef>
               <a:defRPr sz="1200" b="0" i="0">
                 <a:solidFill>
-                  <a:srgbClr val="D8B4FE"/>
-                </a:solidFill>
-                <a:latin typeface="Georgia"/>
-              </a:defRPr>
-            </a:pPr>
-            <a:r>
-              <a:t>Food Sponsors</a:t>
+                  <a:srgbClr val="FFCC4D"/>
+                </a:solidFill>
+                <a:latin typeface="Georgia"/>
+              </a:defRPr>
+            </a:pPr>
+            <a:r>
+              <a:t>Recessional</a:t>
             </a:r>
           </a:p>
         </p:txBody>
@@ -21396,7 +21326,7 @@
     <p:bg>
       <p:bgPr>
         <a:solidFill>
-          <a:srgbClr val="211733"/>
+          <a:srgbClr val="000000"/>
         </a:solidFill>
         <a:effectLst/>
       </p:bgPr>
@@ -21476,49 +21406,93 @@
         </p:nvSpPr>
         <p:spPr>
           <a:xfrm>
-            <a:off x="914400" y="1490472"/>
-            <a:ext cx="16459200" cy="7790688"/>
-          </a:xfrm>
-          <a:prstGeom prst="rect">
-            <a:avLst/>
-          </a:prstGeom>
-          <a:noFill/>
-        </p:spPr>
-        <p:txBody>
-          <a:bodyPr wrap="square" lIns="109728" rIns="109728" tIns="73152" bIns="73152">
-            <a:noAutofit/>
-          </a:bodyPr>
-          <a:lstStyle/>
-          <a:p>
-            <a:pPr algn="ctr">
-              <a:spcAft>
-                <a:spcPts val="500"/>
-              </a:spcAft>
-              <a:defRPr sz="1900" b="1" i="0">
-                <a:solidFill>
-                  <a:srgbClr val="FFFFFF"/>
-                </a:solidFill>
-                <a:latin typeface="Georgia"/>
-              </a:defRPr>
-            </a:pPr>
-            <a:r>
-              <a:t>CHURCH ANNOUNCEMENTS</a:t>
-            </a:r>
-          </a:p>
-          <a:p>
-            <a:pPr algn="ctr">
-              <a:spcAft>
-                <a:spcPts val="500"/>
-              </a:spcAft>
-              <a:defRPr sz="1500" b="0" i="1">
-                <a:solidFill>
-                  <a:srgbClr val="D8B4FE"/>
-                </a:solidFill>
-                <a:latin typeface="Georgia"/>
-              </a:defRPr>
-            </a:pPr>
-            <a:r>
-              <a:t>Insert bulletin points with complete sentences on the following slides or edit this deck.</a:t>
+            <a:off x="0" y="1490472"/>
+            <a:ext cx="18288000" cy="7927848"/>
+          </a:xfrm>
+          <a:prstGeom prst="rect">
+            <a:avLst/>
+          </a:prstGeom>
+          <a:noFill/>
+        </p:spPr>
+        <p:txBody>
+          <a:bodyPr wrap="square" lIns="109728" rIns="109728" tIns="73152" bIns="73152" anchor="ctr">
+            <a:noAutofit/>
+          </a:bodyPr>
+          <a:lstStyle/>
+          <a:p>
+            <a:pPr algn="ctr">
+              <a:lnSpc>
+                <a:spcPct val="105000"/>
+              </a:lnSpc>
+              <a:spcAft>
+                <a:spcPts val="1000"/>
+              </a:spcAft>
+              <a:defRPr sz="5500" b="1" i="0">
+                <a:solidFill>
+                  <a:srgbClr val="FFFFFF"/>
+                </a:solidFill>
+                <a:latin typeface="Arial Black"/>
+              </a:defRPr>
+            </a:pPr>
+            <a:r>
+              <a:t>WE ARE SENT IN THE POWER OF LOVE,</a:t>
+            </a:r>
+          </a:p>
+          <a:p>
+            <a:pPr algn="ctr">
+              <a:lnSpc>
+                <a:spcPct val="105000"/>
+              </a:lnSpc>
+              <a:spcAft>
+                <a:spcPts val="1000"/>
+              </a:spcAft>
+              <a:defRPr sz="5500" b="1" i="0">
+                <a:solidFill>
+                  <a:srgbClr val="FFFFFF"/>
+                </a:solidFill>
+                <a:latin typeface="Arial Black"/>
+              </a:defRPr>
+            </a:pPr>
+            <a:r>
+              <a:t>BEARING PEACE LIKE A PURE, HOLY DOVE</a:t>
+            </a:r>
+          </a:p>
+          <a:p>
+            <a:pPr algn="ctr">
+              <a:lnSpc>
+                <a:spcPct val="105000"/>
+              </a:lnSpc>
+              <a:spcAft>
+                <a:spcPts val="1000"/>
+              </a:spcAft>
+              <a:defRPr sz="5500" b="1" i="0">
+                <a:solidFill>
+                  <a:srgbClr val="FFFFFF"/>
+                </a:solidFill>
+                <a:latin typeface="Arial Black"/>
+              </a:defRPr>
+            </a:pPr>
+            <a:r>
+              <a:t>TO EVERY NATION, EVERY LAND.</a:t>
+            </a:r>
+          </a:p>
+          <a:p>
+            <a:pPr algn="ctr">
+              <a:lnSpc>
+                <a:spcPct val="105000"/>
+              </a:lnSpc>
+              <a:spcAft>
+                <a:spcPts val="1000"/>
+              </a:spcAft>
+              <a:defRPr sz="5500" b="1" i="0">
+                <a:solidFill>
+                  <a:srgbClr val="FFFFFF"/>
+                </a:solidFill>
+                <a:latin typeface="Arial Black"/>
+              </a:defRPr>
+            </a:pPr>
+            <a:r>
+              <a:t>GO MAKE A DIFFERENCE.</a:t>
             </a:r>
           </a:p>
         </p:txBody>
@@ -21548,7 +21522,7 @@
             <a:pPr>
               <a:defRPr sz="1300" b="1" i="0">
                 <a:solidFill>
-                  <a:srgbClr val="F8C66A"/>
+                  <a:srgbClr val="8C8C91"/>
                 </a:solidFill>
                 <a:latin typeface="Georgia"/>
               </a:defRPr>
@@ -21564,13 +21538,13 @@
               </a:spcBef>
               <a:defRPr sz="1200" b="0" i="0">
                 <a:solidFill>
-                  <a:srgbClr val="D8B4FE"/>
-                </a:solidFill>
-                <a:latin typeface="Georgia"/>
-              </a:defRPr>
-            </a:pPr>
-            <a:r>
-              <a:t>Announcements</a:t>
+                  <a:srgbClr val="FFCC4D"/>
+                </a:solidFill>
+                <a:latin typeface="Georgia"/>
+              </a:defRPr>
+            </a:pPr>
+            <a:r>
+              <a:t>Recessional</a:t>
             </a:r>
           </a:p>
         </p:txBody>
@@ -21589,7 +21563,7 @@
     <p:bg>
       <p:bgPr>
         <a:solidFill>
-          <a:srgbClr val="211733"/>
+          <a:srgbClr val="000000"/>
         </a:solidFill>
         <a:effectLst/>
       </p:bgPr>
@@ -21669,49 +21643,74 @@
         </p:nvSpPr>
         <p:spPr>
           <a:xfrm>
-            <a:off x="914400" y="1490472"/>
-            <a:ext cx="16459200" cy="7790688"/>
-          </a:xfrm>
-          <a:prstGeom prst="rect">
-            <a:avLst/>
-          </a:prstGeom>
-          <a:noFill/>
-        </p:spPr>
-        <p:txBody>
-          <a:bodyPr wrap="square" lIns="109728" rIns="109728" tIns="73152" bIns="73152">
-            <a:noAutofit/>
-          </a:bodyPr>
-          <a:lstStyle/>
-          <a:p>
-            <a:pPr algn="ctr">
-              <a:spcAft>
-                <a:spcPts val="500"/>
-              </a:spcAft>
-              <a:defRPr sz="1900" b="1" i="0">
-                <a:solidFill>
-                  <a:srgbClr val="FFFFFF"/>
-                </a:solidFill>
-                <a:latin typeface="Georgia"/>
-              </a:defRPr>
-            </a:pPr>
-            <a:r>
-              <a:t>Welcome newcomers!</a:t>
-            </a:r>
-          </a:p>
-          <a:p>
-            <a:pPr algn="ctr">
-              <a:spcAft>
-                <a:spcPts val="500"/>
-              </a:spcAft>
-              <a:defRPr sz="1500" b="0" i="1">
-                <a:solidFill>
-                  <a:srgbClr val="D8B4FE"/>
-                </a:solidFill>
-                <a:latin typeface="Georgia"/>
-              </a:defRPr>
-            </a:pPr>
-            <a:r>
-              <a:t>Photo collage optional.</a:t>
+            <a:off x="0" y="1490472"/>
+            <a:ext cx="18288000" cy="7927848"/>
+          </a:xfrm>
+          <a:prstGeom prst="rect">
+            <a:avLst/>
+          </a:prstGeom>
+          <a:noFill/>
+        </p:spPr>
+        <p:txBody>
+          <a:bodyPr wrap="square" lIns="109728" rIns="109728" tIns="73152" bIns="73152" anchor="ctr">
+            <a:noAutofit/>
+          </a:bodyPr>
+          <a:lstStyle/>
+          <a:p>
+            <a:pPr algn="ctr">
+              <a:lnSpc>
+                <a:spcPct val="105000"/>
+              </a:lnSpc>
+              <a:spcAft>
+                <a:spcPts val="1000"/>
+              </a:spcAft>
+              <a:defRPr sz="5500" b="1" i="0">
+                <a:solidFill>
+                  <a:srgbClr val="FFFFFF"/>
+                </a:solidFill>
+                <a:latin typeface="Arial Black"/>
+              </a:defRPr>
+            </a:pPr>
+            <a:r>
+              <a:t>GO MAKE A DIFFERENCE;</a:t>
+            </a:r>
+          </a:p>
+          <a:p>
+            <a:pPr algn="ctr">
+              <a:lnSpc>
+                <a:spcPct val="105000"/>
+              </a:lnSpc>
+              <a:spcAft>
+                <a:spcPts val="1000"/>
+              </a:spcAft>
+              <a:defRPr sz="5500" b="1" i="0">
+                <a:solidFill>
+                  <a:srgbClr val="FFFFFF"/>
+                </a:solidFill>
+                <a:latin typeface="Arial Black"/>
+              </a:defRPr>
+            </a:pPr>
+            <a:r>
+              <a:t>WE CAN MAKE A DIFFERENCE</a:t>
+            </a:r>
+          </a:p>
+          <a:p>
+            <a:pPr algn="ctr">
+              <a:lnSpc>
+                <a:spcPct val="105000"/>
+              </a:lnSpc>
+              <a:spcAft>
+                <a:spcPts val="1000"/>
+              </a:spcAft>
+              <a:defRPr sz="5500" b="1" i="0">
+                <a:solidFill>
+                  <a:srgbClr val="FFFFFF"/>
+                </a:solidFill>
+                <a:latin typeface="Arial Black"/>
+              </a:defRPr>
+            </a:pPr>
+            <a:r>
+              <a:t>IN THE NAME OF THE LORD.</a:t>
             </a:r>
           </a:p>
         </p:txBody>
@@ -21741,7 +21740,7 @@
             <a:pPr>
               <a:defRPr sz="1300" b="1" i="0">
                 <a:solidFill>
-                  <a:srgbClr val="F8C66A"/>
+                  <a:srgbClr val="8C8C91"/>
                 </a:solidFill>
                 <a:latin typeface="Georgia"/>
               </a:defRPr>
@@ -21757,13 +21756,13 @@
               </a:spcBef>
               <a:defRPr sz="1200" b="0" i="0">
                 <a:solidFill>
-                  <a:srgbClr val="D8B4FE"/>
-                </a:solidFill>
-                <a:latin typeface="Georgia"/>
-              </a:defRPr>
-            </a:pPr>
-            <a:r>
-              <a:t>Announcements</a:t>
+                  <a:srgbClr val="FFCC4D"/>
+                </a:solidFill>
+                <a:latin typeface="Georgia"/>
+              </a:defRPr>
+            </a:pPr>
+            <a:r>
+              <a:t>Recessional</a:t>
             </a:r>
           </a:p>
         </p:txBody>
@@ -21782,7 +21781,7 @@
     <p:bg>
       <p:bgPr>
         <a:solidFill>
-          <a:srgbClr val="211733"/>
+          <a:srgbClr val="000000"/>
         </a:solidFill>
         <a:effectLst/>
       </p:bgPr>
@@ -21862,49 +21861,74 @@
         </p:nvSpPr>
         <p:spPr>
           <a:xfrm>
-            <a:off x="914400" y="1490472"/>
-            <a:ext cx="16459200" cy="7790688"/>
-          </a:xfrm>
-          <a:prstGeom prst="rect">
-            <a:avLst/>
-          </a:prstGeom>
-          <a:noFill/>
-        </p:spPr>
-        <p:txBody>
-          <a:bodyPr wrap="square" lIns="109728" rIns="109728" tIns="73152" bIns="73152">
-            <a:noAutofit/>
-          </a:bodyPr>
-          <a:lstStyle/>
-          <a:p>
-            <a:pPr algn="ctr">
-              <a:spcAft>
-                <a:spcPts val="500"/>
-              </a:spcAft>
-              <a:defRPr sz="1900" b="1" i="0">
-                <a:solidFill>
-                  <a:srgbClr val="FFFFFF"/>
-                </a:solidFill>
-                <a:latin typeface="Georgia"/>
-              </a:defRPr>
-            </a:pPr>
-            <a:r>
-              <a:t>Sacrament of Confession</a:t>
-            </a:r>
-          </a:p>
-          <a:p>
-            <a:pPr algn="ctr">
-              <a:spcAft>
-                <a:spcPts val="500"/>
-              </a:spcAft>
-              <a:defRPr sz="1500" b="0" i="1">
-                <a:solidFill>
-                  <a:srgbClr val="D8B4FE"/>
-                </a:solidFill>
-                <a:latin typeface="Georgia"/>
-              </a:defRPr>
-            </a:pPr>
-            <a:r>
-              <a:t>The Lord never tires of forgiving us; we are the ones who tire of seeking his mercy. — Pope Francis</a:t>
+            <a:off x="0" y="1490472"/>
+            <a:ext cx="18288000" cy="7927848"/>
+          </a:xfrm>
+          <a:prstGeom prst="rect">
+            <a:avLst/>
+          </a:prstGeom>
+          <a:noFill/>
+        </p:spPr>
+        <p:txBody>
+          <a:bodyPr wrap="square" lIns="109728" rIns="109728" tIns="73152" bIns="73152" anchor="ctr">
+            <a:noAutofit/>
+          </a:bodyPr>
+          <a:lstStyle/>
+          <a:p>
+            <a:pPr algn="ctr">
+              <a:lnSpc>
+                <a:spcPct val="105000"/>
+              </a:lnSpc>
+              <a:spcAft>
+                <a:spcPts val="1000"/>
+              </a:spcAft>
+              <a:defRPr sz="5500" b="1" i="0">
+                <a:solidFill>
+                  <a:srgbClr val="FFFFFF"/>
+                </a:solidFill>
+                <a:latin typeface="Arial Black"/>
+              </a:defRPr>
+            </a:pPr>
+            <a:r>
+              <a:t>WE ARE THE SALT OF THE EARTH,</a:t>
+            </a:r>
+          </a:p>
+          <a:p>
+            <a:pPr algn="ctr">
+              <a:lnSpc>
+                <a:spcPct val="105000"/>
+              </a:lnSpc>
+              <a:spcAft>
+                <a:spcPts val="1000"/>
+              </a:spcAft>
+              <a:defRPr sz="5500" b="1" i="0">
+                <a:solidFill>
+                  <a:srgbClr val="FFFFFF"/>
+                </a:solidFill>
+                <a:latin typeface="Arial Black"/>
+              </a:defRPr>
+            </a:pPr>
+            <a:r>
+              <a:t>CALLED TO GIVE THE WORLD A NEW TASTE:</a:t>
+            </a:r>
+          </a:p>
+          <a:p>
+            <a:pPr algn="ctr">
+              <a:lnSpc>
+                <a:spcPct val="105000"/>
+              </a:lnSpc>
+              <a:spcAft>
+                <a:spcPts val="1000"/>
+              </a:spcAft>
+              <a:defRPr sz="5500" b="1" i="0">
+                <a:solidFill>
+                  <a:srgbClr val="FFFFFF"/>
+                </a:solidFill>
+                <a:latin typeface="Arial Black"/>
+              </a:defRPr>
+            </a:pPr>
+            <a:r>
+              <a:t>LOVE, JUSTICE, MERCY, AND PRAISE.</a:t>
             </a:r>
           </a:p>
         </p:txBody>
@@ -21934,7 +21958,7 @@
             <a:pPr>
               <a:defRPr sz="1300" b="1" i="0">
                 <a:solidFill>
-                  <a:srgbClr val="F8C66A"/>
+                  <a:srgbClr val="8C8C91"/>
                 </a:solidFill>
                 <a:latin typeface="Georgia"/>
               </a:defRPr>
@@ -21950,13 +21974,13 @@
               </a:spcBef>
               <a:defRPr sz="1200" b="0" i="0">
                 <a:solidFill>
-                  <a:srgbClr val="D8B4FE"/>
-                </a:solidFill>
-                <a:latin typeface="Georgia"/>
-              </a:defRPr>
-            </a:pPr>
-            <a:r>
-              <a:t>Announcements</a:t>
+                  <a:srgbClr val="FFCC4D"/>
+                </a:solidFill>
+                <a:latin typeface="Georgia"/>
+              </a:defRPr>
+            </a:pPr>
+            <a:r>
+              <a:t>Recessional</a:t>
             </a:r>
           </a:p>
         </p:txBody>
@@ -21975,7 +21999,7 @@
     <p:bg>
       <p:bgPr>
         <a:solidFill>
-          <a:srgbClr val="211733"/>
+          <a:srgbClr val="000000"/>
         </a:solidFill>
         <a:effectLst/>
       </p:bgPr>
@@ -22055,49 +22079,74 @@
         </p:nvSpPr>
         <p:spPr>
           <a:xfrm>
-            <a:off x="914400" y="1490472"/>
-            <a:ext cx="16459200" cy="7790688"/>
-          </a:xfrm>
-          <a:prstGeom prst="rect">
-            <a:avLst/>
-          </a:prstGeom>
-          <a:noFill/>
-        </p:spPr>
-        <p:txBody>
-          <a:bodyPr wrap="square" lIns="109728" rIns="109728" tIns="73152" bIns="73152">
-            <a:noAutofit/>
-          </a:bodyPr>
-          <a:lstStyle/>
-          <a:p>
-            <a:pPr algn="ctr">
-              <a:spcAft>
-                <a:spcPts val="500"/>
-              </a:spcAft>
-              <a:defRPr sz="1900" b="1" i="0">
-                <a:solidFill>
-                  <a:srgbClr val="FFFFFF"/>
-                </a:solidFill>
-                <a:latin typeface="Georgia"/>
-              </a:defRPr>
-            </a:pPr>
-            <a:r>
-              <a:t>Updates and Announcements</a:t>
-            </a:r>
-          </a:p>
-          <a:p>
-            <a:pPr algn="ctr">
-              <a:spcAft>
-                <a:spcPts val="500"/>
-              </a:spcAft>
-              <a:defRPr sz="1500" b="0" i="1">
-                <a:solidFill>
-                  <a:srgbClr val="D8B4FE"/>
-                </a:solidFill>
-                <a:latin typeface="Georgia"/>
-              </a:defRPr>
-            </a:pPr>
-            <a:r>
-              <a:t>Name your community page and invitation to follow in full; add a QR code to the slide master if you wish.</a:t>
+            <a:off x="0" y="1490472"/>
+            <a:ext cx="18288000" cy="7927848"/>
+          </a:xfrm>
+          <a:prstGeom prst="rect">
+            <a:avLst/>
+          </a:prstGeom>
+          <a:noFill/>
+        </p:spPr>
+        <p:txBody>
+          <a:bodyPr wrap="square" lIns="109728" rIns="109728" tIns="73152" bIns="73152" anchor="ctr">
+            <a:noAutofit/>
+          </a:bodyPr>
+          <a:lstStyle/>
+          <a:p>
+            <a:pPr algn="ctr">
+              <a:lnSpc>
+                <a:spcPct val="105000"/>
+              </a:lnSpc>
+              <a:spcAft>
+                <a:spcPts val="1000"/>
+              </a:spcAft>
+              <a:defRPr sz="5500" b="1" i="0">
+                <a:solidFill>
+                  <a:srgbClr val="FFFFFF"/>
+                </a:solidFill>
+                <a:latin typeface="Arial Black"/>
+              </a:defRPr>
+            </a:pPr>
+            <a:r>
+              <a:t>GO MAKE A DIFFERENCE.</a:t>
+            </a:r>
+          </a:p>
+          <a:p>
+            <a:pPr algn="ctr">
+              <a:lnSpc>
+                <a:spcPct val="105000"/>
+              </a:lnSpc>
+              <a:spcAft>
+                <a:spcPts val="1000"/>
+              </a:spcAft>
+              <a:defRPr sz="5500" b="1" i="0">
+                <a:solidFill>
+                  <a:srgbClr val="FFFFFF"/>
+                </a:solidFill>
+                <a:latin typeface="Arial Black"/>
+              </a:defRPr>
+            </a:pPr>
+            <a:r>
+              <a:t>GO MAKE A DIFFERENCE;</a:t>
+            </a:r>
+          </a:p>
+          <a:p>
+            <a:pPr algn="ctr">
+              <a:lnSpc>
+                <a:spcPct val="105000"/>
+              </a:lnSpc>
+              <a:spcAft>
+                <a:spcPts val="1000"/>
+              </a:spcAft>
+              <a:defRPr sz="5500" b="1" i="0">
+                <a:solidFill>
+                  <a:srgbClr val="FFFFFF"/>
+                </a:solidFill>
+                <a:latin typeface="Arial Black"/>
+              </a:defRPr>
+            </a:pPr>
+            <a:r>
+              <a:t>WE CAN MAKE A DIFFERENCE</a:t>
             </a:r>
           </a:p>
         </p:txBody>
@@ -22127,7 +22176,7 @@
             <a:pPr>
               <a:defRPr sz="1300" b="1" i="0">
                 <a:solidFill>
-                  <a:srgbClr val="F8C66A"/>
+                  <a:srgbClr val="8C8C91"/>
                 </a:solidFill>
                 <a:latin typeface="Georgia"/>
               </a:defRPr>
@@ -22143,13 +22192,13 @@
               </a:spcBef>
               <a:defRPr sz="1200" b="0" i="0">
                 <a:solidFill>
-                  <a:srgbClr val="D8B4FE"/>
-                </a:solidFill>
-                <a:latin typeface="Georgia"/>
-              </a:defRPr>
-            </a:pPr>
-            <a:r>
-              <a:t>Announcements</a:t>
+                  <a:srgbClr val="FFCC4D"/>
+                </a:solidFill>
+                <a:latin typeface="Georgia"/>
+              </a:defRPr>
+            </a:pPr>
+            <a:r>
+              <a:t>Recessional</a:t>
             </a:r>
           </a:p>
         </p:txBody>
@@ -22386,7 +22435,7 @@
     <p:bg>
       <p:bgPr>
         <a:solidFill>
-          <a:srgbClr val="211733"/>
+          <a:srgbClr val="000000"/>
         </a:solidFill>
         <a:effectLst/>
       </p:bgPr>
@@ -22466,131 +22515,74 @@
         </p:nvSpPr>
         <p:spPr>
           <a:xfrm>
-            <a:off x="914400" y="1490472"/>
-            <a:ext cx="16459200" cy="7790688"/>
-          </a:xfrm>
-          <a:prstGeom prst="rect">
-            <a:avLst/>
-          </a:prstGeom>
-          <a:noFill/>
-        </p:spPr>
-        <p:txBody>
-          <a:bodyPr wrap="square" lIns="109728" rIns="109728" tIns="73152" bIns="73152">
-            <a:noAutofit/>
-          </a:bodyPr>
-          <a:lstStyle/>
-          <a:p>
-            <a:pPr algn="ctr">
-              <a:spcBef>
-                <a:spcPts val="400"/>
-              </a:spcBef>
-              <a:spcAft>
-                <a:spcPts val="500"/>
-              </a:spcAft>
-              <a:defRPr sz="2000" b="1" i="0">
-                <a:solidFill>
-                  <a:srgbClr val="D8B4FE"/>
-                </a:solidFill>
-                <a:latin typeface="Georgia"/>
-              </a:defRPr>
-            </a:pPr>
-            <a:r>
-              <a:t>Priest: The Lord be with you.</a:t>
-            </a:r>
-          </a:p>
-          <a:p>
-            <a:pPr algn="ctr">
-              <a:spcBef>
-                <a:spcPts val="400"/>
-              </a:spcBef>
-              <a:spcAft>
-                <a:spcPts val="500"/>
-              </a:spcAft>
-              <a:defRPr sz="2000" b="1" i="0">
-                <a:solidFill>
-                  <a:srgbClr val="FFFFFF"/>
-                </a:solidFill>
-                <a:latin typeface="Georgia"/>
-              </a:defRPr>
-            </a:pPr>
-            <a:r>
-              <a:t>All: And with your spirit.</a:t>
-            </a:r>
-          </a:p>
-          <a:p>
-            <a:pPr algn="ctr">
-              <a:spcBef>
-                <a:spcPts val="400"/>
-              </a:spcBef>
-              <a:spcAft>
-                <a:spcPts val="500"/>
-              </a:spcAft>
-              <a:defRPr sz="2000" b="1" i="0">
-                <a:solidFill>
-                  <a:srgbClr val="D8B4FE"/>
-                </a:solidFill>
-                <a:latin typeface="Georgia"/>
-              </a:defRPr>
-            </a:pPr>
-            <a:r>
-              <a:t>Priest: May almighty God bless you, the Father, and the Son, and the Holy Spirit.</a:t>
-            </a:r>
-          </a:p>
-          <a:p>
-            <a:pPr algn="ctr">
-              <a:spcBef>
-                <a:spcPts val="400"/>
-              </a:spcBef>
-              <a:spcAft>
-                <a:spcPts val="500"/>
-              </a:spcAft>
-              <a:defRPr sz="2000" b="1" i="0">
-                <a:solidFill>
-                  <a:srgbClr val="FFFFFF"/>
-                </a:solidFill>
-                <a:latin typeface="Georgia"/>
-              </a:defRPr>
-            </a:pPr>
-            <a:r>
-              <a:t>All: Amen.</a:t>
-            </a:r>
-          </a:p>
-          <a:p>
-            <a:pPr algn="ctr">
-              <a:spcBef>
-                <a:spcPts val="400"/>
-              </a:spcBef>
-              <a:spcAft>
-                <a:spcPts val="500"/>
-              </a:spcAft>
-              <a:defRPr sz="2000" b="1" i="0">
-                <a:solidFill>
-                  <a:srgbClr val="D8B4FE"/>
-                </a:solidFill>
-                <a:latin typeface="Georgia"/>
-              </a:defRPr>
-            </a:pPr>
-            <a:r>
-              <a:t>Priest: Go in peace, glorifying the Lord by your life.</a:t>
-            </a:r>
-          </a:p>
-          <a:p>
-            <a:pPr algn="ctr">
-              <a:spcBef>
-                <a:spcPts val="400"/>
-              </a:spcBef>
-              <a:spcAft>
-                <a:spcPts val="500"/>
-              </a:spcAft>
-              <a:defRPr sz="2000" b="1" i="0">
-                <a:solidFill>
-                  <a:srgbClr val="FFFFFF"/>
-                </a:solidFill>
-                <a:latin typeface="Georgia"/>
-              </a:defRPr>
-            </a:pPr>
-            <a:r>
-              <a:t>All: Thanks be to God.</a:t>
+            <a:off x="0" y="1490472"/>
+            <a:ext cx="18288000" cy="7927848"/>
+          </a:xfrm>
+          <a:prstGeom prst="rect">
+            <a:avLst/>
+          </a:prstGeom>
+          <a:noFill/>
+        </p:spPr>
+        <p:txBody>
+          <a:bodyPr wrap="square" lIns="109728" rIns="109728" tIns="73152" bIns="73152" anchor="ctr">
+            <a:noAutofit/>
+          </a:bodyPr>
+          <a:lstStyle/>
+          <a:p>
+            <a:pPr algn="ctr">
+              <a:lnSpc>
+                <a:spcPct val="105000"/>
+              </a:lnSpc>
+              <a:spcAft>
+                <a:spcPts val="1000"/>
+              </a:spcAft>
+              <a:defRPr sz="5500" b="1" i="0">
+                <a:solidFill>
+                  <a:srgbClr val="FFFFFF"/>
+                </a:solidFill>
+                <a:latin typeface="Arial Black"/>
+              </a:defRPr>
+            </a:pPr>
+            <a:r>
+              <a:t>IN THE NAME OF THE LORD.</a:t>
+            </a:r>
+          </a:p>
+          <a:p>
+            <a:pPr algn="ctr">
+              <a:lnSpc>
+                <a:spcPct val="105000"/>
+              </a:lnSpc>
+              <a:spcAft>
+                <a:spcPts val="1000"/>
+              </a:spcAft>
+              <a:defRPr sz="5500" b="1" i="0">
+                <a:solidFill>
+                  <a:srgbClr val="FFFFFF"/>
+                </a:solidFill>
+                <a:latin typeface="Arial Black"/>
+              </a:defRPr>
+            </a:pPr>
+            <a:r>
+              <a:t>WE ARE A LIGHT ON THE HILL,</a:t>
+            </a:r>
+          </a:p>
+          <a:p>
+            <a:pPr algn="ctr">
+              <a:lnSpc>
+                <a:spcPct val="105000"/>
+              </a:lnSpc>
+              <a:spcAft>
+                <a:spcPts val="1000"/>
+              </a:spcAft>
+              <a:defRPr sz="5500" b="1" i="0">
+                <a:solidFill>
+                  <a:srgbClr val="FFFFFF"/>
+                </a:solidFill>
+                <a:latin typeface="Arial Black"/>
+              </a:defRPr>
+            </a:pPr>
+            <a:r>
+              <a:t>MAY OUR GOOD DEEDS SHINE, LORD, UNTIL</a:t>
             </a:r>
           </a:p>
         </p:txBody>
@@ -22620,7 +22612,7 @@
             <a:pPr>
               <a:defRPr sz="1300" b="1" i="0">
                 <a:solidFill>
-                  <a:srgbClr val="F8C66A"/>
+                  <a:srgbClr val="8C8C91"/>
                 </a:solidFill>
                 <a:latin typeface="Georgia"/>
               </a:defRPr>
@@ -22636,13 +22628,13 @@
               </a:spcBef>
               <a:defRPr sz="1200" b="0" i="0">
                 <a:solidFill>
-                  <a:srgbClr val="D8B4FE"/>
-                </a:solidFill>
-                <a:latin typeface="Georgia"/>
-              </a:defRPr>
-            </a:pPr>
-            <a:r>
-              <a:t>Final Blessing</a:t>
+                  <a:srgbClr val="FFCC4D"/>
+                </a:solidFill>
+                <a:latin typeface="Georgia"/>
+              </a:defRPr>
+            </a:pPr>
+            <a:r>
+              <a:t>Recessional</a:t>
             </a:r>
           </a:p>
         </p:txBody>
@@ -22741,44 +22733,8 @@
         </p:nvSpPr>
         <p:spPr>
           <a:xfrm>
-            <a:off x="914400" y="1490472"/>
-            <a:ext cx="16459200" cy="868680"/>
-          </a:xfrm>
-          <a:prstGeom prst="rect">
-            <a:avLst/>
-          </a:prstGeom>
-          <a:noFill/>
-        </p:spPr>
-        <p:txBody>
-          <a:bodyPr wrap="square" lIns="109728" rIns="109728" tIns="73152" bIns="73152">
-            <a:noAutofit/>
-          </a:bodyPr>
-          <a:lstStyle/>
-          <a:p>
-            <a:pPr algn="ctr">
-              <a:defRPr sz="3800" b="1" i="0">
-                <a:solidFill>
-                  <a:srgbClr val="FFCC4D"/>
-                </a:solidFill>
-                <a:latin typeface="Georgia"/>
-              </a:defRPr>
-            </a:pPr>
-            <a:r>
-              <a:t>Go Make a Difference</a:t>
-            </a:r>
-          </a:p>
-        </p:txBody>
-      </p:sp>
-      <p:sp>
-        <p:nvSpPr>
-          <p:cNvPr id="5" name="TextBox 4"/>
-          <p:cNvSpPr txBox="1"/>
-          <p:nvPr/>
-        </p:nvSpPr>
-        <p:spPr>
-          <a:xfrm>
-            <a:off x="0" y="2587752"/>
-            <a:ext cx="18288000" cy="6830568"/>
+            <a:off x="0" y="1490472"/>
+            <a:ext cx="18288000" cy="7927848"/>
           </a:xfrm>
           <a:prstGeom prst="rect">
             <a:avLst/>
@@ -22806,7 +22762,7 @@
               </a:defRPr>
             </a:pPr>
             <a:r>
-              <a:t>GO MAKE A DIFFERENCE;</a:t>
+              <a:t>ALL KNOW YOUR KINGDOM IS NEAR.</a:t>
             </a:r>
           </a:p>
           <a:p>
@@ -22825,33 +22781,14 @@
               </a:defRPr>
             </a:pPr>
             <a:r>
-              <a:t>WE CAN MAKE A DIFFERENCE</a:t>
-            </a:r>
-          </a:p>
-          <a:p>
-            <a:pPr algn="ctr">
-              <a:lnSpc>
-                <a:spcPct val="105000"/>
-              </a:lnSpc>
-              <a:spcAft>
-                <a:spcPts val="1000"/>
-              </a:spcAft>
-              <a:defRPr sz="5500" b="1" i="0">
-                <a:solidFill>
-                  <a:srgbClr val="FFFFFF"/>
-                </a:solidFill>
-                <a:latin typeface="Arial Black"/>
-              </a:defRPr>
-            </a:pPr>
-            <a:r>
-              <a:t>IN THE NAME OF THE LORD.</a:t>
-            </a:r>
-          </a:p>
-        </p:txBody>
-      </p:sp>
-      <p:sp>
-        <p:nvSpPr>
-          <p:cNvPr id="6" name="TextBox 5"/>
+              <a:t>GO MAKE A DIFFERENCE.</a:t>
+            </a:r>
+          </a:p>
+        </p:txBody>
+      </p:sp>
+      <p:sp>
+        <p:nvSpPr>
+          <p:cNvPr id="5" name="TextBox 4"/>
           <p:cNvSpPr txBox="1"/>
           <p:nvPr/>
         </p:nvSpPr>
@@ -22912,10 +22849,392 @@
 <file path=ppt/slides/slide82.xml><?xml version="1.0" encoding="utf-8"?>
 <p:sld xmlns:a="http://schemas.openxmlformats.org/drawingml/2006/main" xmlns:p="http://schemas.openxmlformats.org/presentationml/2006/main" xmlns:r="http://schemas.openxmlformats.org/officeDocument/2006/relationships">
   <p:cSld>
+    <p:spTree>
+      <p:nvGrpSpPr>
+        <p:cNvPr id="1" name=""/>
+        <p:cNvGrpSpPr/>
+        <p:nvPr/>
+      </p:nvGrpSpPr>
+      <p:grpSpPr/>
+      <p:pic>
+        <p:nvPicPr>
+          <p:cNvPr id="2" name="Picture 1" descr="GFCC24May2026_Eastertide_16x9.png"/>
+          <p:cNvPicPr>
+            <a:picLocks noChangeAspect="1"/>
+          </p:cNvPicPr>
+          <p:nvPr/>
+        </p:nvPicPr>
+        <p:blipFill>
+          <a:blip r:embed="rId2"/>
+          <a:stretch>
+            <a:fillRect/>
+          </a:stretch>
+        </p:blipFill>
+        <p:spPr>
+          <a:xfrm>
+            <a:off x="0" y="0"/>
+            <a:ext cx="18288000" cy="10287000"/>
+          </a:xfrm>
+          <a:prstGeom prst="rect">
+            <a:avLst/>
+          </a:prstGeom>
+        </p:spPr>
+      </p:pic>
+      <p:pic>
+        <p:nvPicPr>
+          <p:cNvPr id="3" name="Picture 2" descr="community_logo.png"/>
+          <p:cNvPicPr>
+            <a:picLocks noChangeAspect="1"/>
+          </p:cNvPicPr>
+          <p:nvPr/>
+        </p:nvPicPr>
+        <p:blipFill>
+          <a:blip r:embed="rId3"/>
+          <a:stretch>
+            <a:fillRect/>
+          </a:stretch>
+        </p:blipFill>
+        <p:spPr>
+          <a:xfrm>
+            <a:off x="914400" y="256032"/>
+            <a:ext cx="387682" cy="384048"/>
+          </a:xfrm>
+          <a:prstGeom prst="rect">
+            <a:avLst/>
+          </a:prstGeom>
+        </p:spPr>
+      </p:pic>
+      <p:sp>
+        <p:nvSpPr>
+          <p:cNvPr id="4" name="TextBox 3"/>
+          <p:cNvSpPr txBox="1"/>
+          <p:nvPr/>
+        </p:nvSpPr>
+        <p:spPr>
+          <a:xfrm>
+            <a:off x="1430098" y="256032"/>
+            <a:ext cx="15943502" cy="384048"/>
+          </a:xfrm>
+          <a:prstGeom prst="rect">
+            <a:avLst/>
+          </a:prstGeom>
+          <a:noFill/>
+        </p:spPr>
+        <p:txBody>
+          <a:bodyPr wrap="square" lIns="109728" rIns="109728" tIns="73152" bIns="73152" anchor="ctr">
+            <a:noAutofit/>
+          </a:bodyPr>
+          <a:lstStyle/>
+          <a:p>
+            <a:pPr algn="l">
+              <a:defRPr sz="1500" b="1" i="0">
+                <a:solidFill>
+                  <a:srgbClr val="FFFFFF"/>
+                </a:solidFill>
+                <a:latin typeface="Georgia"/>
+              </a:defRPr>
+            </a:pPr>
+            <a:r>
+              <a:t>Gwangju Filipino Catholic Community</a:t>
+            </a:r>
+          </a:p>
+        </p:txBody>
+      </p:sp>
+      <p:sp>
+        <p:nvSpPr>
+          <p:cNvPr id="5" name="TextBox 4"/>
+          <p:cNvSpPr txBox="1"/>
+          <p:nvPr/>
+        </p:nvSpPr>
+        <p:spPr>
+          <a:xfrm>
+            <a:off x="914400" y="1810512"/>
+            <a:ext cx="16459200" cy="5943600"/>
+          </a:xfrm>
+          <a:prstGeom prst="rect">
+            <a:avLst/>
+          </a:prstGeom>
+          <a:noFill/>
+        </p:spPr>
+        <p:txBody>
+          <a:bodyPr wrap="square" lIns="109728" rIns="109728" tIns="73152" bIns="73152">
+            <a:noAutofit/>
+          </a:bodyPr>
+          <a:lstStyle/>
+          <a:p>
+            <a:pPr>
+              <a:spcAft>
+                <a:spcPts val="300"/>
+              </a:spcAft>
+              <a:defRPr sz="2100" b="1" i="0">
+                <a:solidFill>
+                  <a:srgbClr val="D8B4FE"/>
+                </a:solidFill>
+                <a:latin typeface="Georgia"/>
+              </a:defRPr>
+            </a:pPr>
+            <a:r>
+              <a:t>MASS CELEBRANT:</a:t>
+            </a:r>
+          </a:p>
+          <a:p>
+            <a:pPr>
+              <a:spcAft>
+                <a:spcPts val="300"/>
+              </a:spcAft>
+              <a:defRPr sz="2100" b="0" i="0">
+                <a:solidFill>
+                  <a:srgbClr val="FFFFFF"/>
+                </a:solidFill>
+                <a:latin typeface="Georgia"/>
+              </a:defRPr>
+            </a:pPr>
+            <a:r>
+              <a:t>Rev.Fr. Jonrey Lauron, RCJ</a:t>
+            </a:r>
+          </a:p>
+          <a:p>
+            <a:pPr>
+              <a:spcAft>
+                <a:spcPts val="300"/>
+              </a:spcAft>
+              <a:defRPr sz="2100" b="0" i="0">
+                <a:solidFill>
+                  <a:srgbClr val="FFFFFF"/>
+                </a:solidFill>
+                <a:latin typeface="Georgia"/>
+              </a:defRPr>
+            </a:pPr>
+          </a:p>
+          <a:p>
+            <a:pPr>
+              <a:spcAft>
+                <a:spcPts val="300"/>
+              </a:spcAft>
+              <a:defRPr sz="2100" b="0" i="0">
+                <a:solidFill>
+                  <a:srgbClr val="FFFFFF"/>
+                </a:solidFill>
+                <a:latin typeface="Georgia"/>
+              </a:defRPr>
+            </a:pPr>
+            <a:r>
+              <a:t>Gwangju</a:t>
+            </a:r>
+            <a:br/>
+            <a:r>
+              <a:t>Filipino</a:t>
+            </a:r>
+            <a:br/>
+            <a:r>
+              <a:t>Catholic</a:t>
+            </a:r>
+            <a:br/>
+            <a:r>
+              <a:t>Community</a:t>
+            </a:r>
+          </a:p>
+          <a:p>
+            <a:pPr>
+              <a:spcAft>
+                <a:spcPts val="300"/>
+              </a:spcAft>
+              <a:defRPr sz="2100" b="0" i="0">
+                <a:solidFill>
+                  <a:srgbClr val="FFFFFF"/>
+                </a:solidFill>
+                <a:latin typeface="Georgia"/>
+              </a:defRPr>
+            </a:pPr>
+          </a:p>
+          <a:p>
+            <a:pPr>
+              <a:spcAft>
+                <a:spcPts val="300"/>
+              </a:spcAft>
+              <a:defRPr sz="2100" b="0" i="0">
+                <a:solidFill>
+                  <a:srgbClr val="FFFFFF"/>
+                </a:solidFill>
+                <a:latin typeface="Georgia"/>
+              </a:defRPr>
+            </a:pPr>
+            <a:r>
+              <a:t>Gospel (John 20:19-23)</a:t>
+            </a:r>
+          </a:p>
+          <a:p>
+            <a:pPr>
+              <a:spcAft>
+                <a:spcPts val="300"/>
+              </a:spcAft>
+              <a:defRPr sz="2100" b="0" i="0">
+                <a:solidFill>
+                  <a:srgbClr val="FFFFFF"/>
+                </a:solidFill>
+                <a:latin typeface="Georgia"/>
+              </a:defRPr>
+            </a:pPr>
+            <a:r>
+              <a:t>“Receive the Holy Spirit!”</a:t>
+            </a:r>
+          </a:p>
+          <a:p>
+            <a:pPr>
+              <a:spcAft>
+                <a:spcPts val="300"/>
+              </a:spcAft>
+              <a:defRPr sz="2100" b="0" i="0">
+                <a:solidFill>
+                  <a:srgbClr val="FFFFFF"/>
+                </a:solidFill>
+                <a:latin typeface="Georgia"/>
+              </a:defRPr>
+            </a:pPr>
+          </a:p>
+          <a:p>
+            <a:pPr>
+              <a:spcAft>
+                <a:spcPts val="300"/>
+              </a:spcAft>
+              <a:defRPr sz="2100" b="0" i="0">
+                <a:solidFill>
+                  <a:srgbClr val="FFFFFF"/>
+                </a:solidFill>
+                <a:latin typeface="Georgia"/>
+              </a:defRPr>
+            </a:pPr>
+            <a:r>
+              <a:t>YEAR A</a:t>
+            </a:r>
+          </a:p>
+          <a:p>
+            <a:pPr>
+              <a:spcAft>
+                <a:spcPts val="300"/>
+              </a:spcAft>
+              <a:defRPr sz="2100" b="0" i="0">
+                <a:solidFill>
+                  <a:srgbClr val="FFFFFF"/>
+                </a:solidFill>
+                <a:latin typeface="Georgia"/>
+              </a:defRPr>
+            </a:pPr>
+            <a:r>
+              <a:t>2026-05-24 · Eastertide</a:t>
+            </a:r>
+          </a:p>
+        </p:txBody>
+      </p:sp>
+      <p:sp>
+        <p:nvSpPr>
+          <p:cNvPr id="6" name="TextBox 5"/>
+          <p:cNvSpPr txBox="1"/>
+          <p:nvPr/>
+        </p:nvSpPr>
+        <p:spPr>
+          <a:xfrm>
+            <a:off x="914400" y="9418320"/>
+            <a:ext cx="16459200" cy="777240"/>
+          </a:xfrm>
+          <a:prstGeom prst="rect">
+            <a:avLst/>
+          </a:prstGeom>
+          <a:noFill/>
+        </p:spPr>
+        <p:txBody>
+          <a:bodyPr wrap="square" lIns="109728" rIns="109728" tIns="73152" bIns="73152">
+            <a:noAutofit/>
+          </a:bodyPr>
+          <a:lstStyle/>
+          <a:p>
+            <a:pPr>
+              <a:defRPr sz="1300" b="1" i="0">
+                <a:solidFill>
+                  <a:srgbClr val="F8C66A"/>
+                </a:solidFill>
+                <a:latin typeface="Georgia"/>
+              </a:defRPr>
+            </a:pPr>
+            <a:r>
+              <a:t>Gwangju Filipino Catholic Community</a:t>
+            </a:r>
+          </a:p>
+          <a:p>
+            <a:pPr>
+              <a:spcBef>
+                <a:spcPts val="200"/>
+              </a:spcBef>
+              <a:defRPr sz="1200" b="0" i="0">
+                <a:solidFill>
+                  <a:srgbClr val="D8B4FE"/>
+                </a:solidFill>
+                <a:latin typeface="Georgia"/>
+              </a:defRPr>
+            </a:pPr>
+            <a:r>
+              <a:t>Mass poster / divider</a:t>
+            </a:r>
+          </a:p>
+        </p:txBody>
+      </p:sp>
+    </p:spTree>
+  </p:cSld>
+  <p:clrMapOvr>
+    <a:masterClrMapping/>
+  </p:clrMapOvr>
+</p:sld>
+</file>
+
+<file path=ppt/slides/slide83.xml><?xml version="1.0" encoding="utf-8"?>
+<p:sld xmlns:a="http://schemas.openxmlformats.org/drawingml/2006/main" xmlns:p="http://schemas.openxmlformats.org/presentationml/2006/main" xmlns:r="http://schemas.openxmlformats.org/officeDocument/2006/relationships">
+  <p:cSld>
+    <p:spTree>
+      <p:nvGrpSpPr>
+        <p:cNvPr id="1" name=""/>
+        <p:cNvGrpSpPr/>
+        <p:nvPr/>
+      </p:nvGrpSpPr>
+      <p:grpSpPr/>
+      <p:pic>
+        <p:nvPicPr>
+          <p:cNvPr id="2" name="Picture 1" descr="GFCC24May2026_Eastertide_16x9.png"/>
+          <p:cNvPicPr>
+            <a:picLocks noChangeAspect="1"/>
+          </p:cNvPicPr>
+          <p:nvPr/>
+        </p:nvPicPr>
+        <p:blipFill>
+          <a:blip r:embed="rId2"/>
+          <a:stretch>
+            <a:fillRect/>
+          </a:stretch>
+        </p:blipFill>
+        <p:spPr>
+          <a:xfrm>
+            <a:off x="0" y="0"/>
+            <a:ext cx="18288000" cy="10287000"/>
+          </a:xfrm>
+          <a:prstGeom prst="rect">
+            <a:avLst/>
+          </a:prstGeom>
+        </p:spPr>
+      </p:pic>
+    </p:spTree>
+  </p:cSld>
+  <p:clrMapOvr>
+    <a:masterClrMapping/>
+  </p:clrMapOvr>
+</p:sld>
+</file>
+
+<file path=ppt/slides/slide84.xml><?xml version="1.0" encoding="utf-8"?>
+<p:sld xmlns:a="http://schemas.openxmlformats.org/drawingml/2006/main" xmlns:p="http://schemas.openxmlformats.org/presentationml/2006/main" xmlns:r="http://schemas.openxmlformats.org/officeDocument/2006/relationships">
+  <p:cSld>
     <p:bg>
       <p:bgPr>
         <a:solidFill>
-          <a:srgbClr val="000000"/>
+          <a:srgbClr val="211733"/>
         </a:solidFill>
         <a:effectLst/>
       </p:bgPr>
@@ -22995,93 +23314,33 @@
         </p:nvSpPr>
         <p:spPr>
           <a:xfrm>
-            <a:off x="0" y="1490472"/>
-            <a:ext cx="18288000" cy="7927848"/>
-          </a:xfrm>
-          <a:prstGeom prst="rect">
-            <a:avLst/>
-          </a:prstGeom>
-          <a:noFill/>
-        </p:spPr>
-        <p:txBody>
-          <a:bodyPr wrap="square" lIns="109728" rIns="109728" tIns="73152" bIns="73152" anchor="ctr">
-            <a:noAutofit/>
-          </a:bodyPr>
-          <a:lstStyle/>
-          <a:p>
-            <a:pPr algn="ctr">
-              <a:lnSpc>
-                <a:spcPct val="105000"/>
-              </a:lnSpc>
-              <a:spcAft>
-                <a:spcPts val="1000"/>
-              </a:spcAft>
-              <a:defRPr sz="5500" b="1" i="0">
-                <a:solidFill>
-                  <a:srgbClr val="FFFFFF"/>
-                </a:solidFill>
-                <a:latin typeface="Arial Black"/>
-              </a:defRPr>
-            </a:pPr>
-            <a:r>
-              <a:t>WE ARE SENT IN THE POWER OF LOVE,</a:t>
-            </a:r>
-          </a:p>
-          <a:p>
-            <a:pPr algn="ctr">
-              <a:lnSpc>
-                <a:spcPct val="105000"/>
-              </a:lnSpc>
-              <a:spcAft>
-                <a:spcPts val="1000"/>
-              </a:spcAft>
-              <a:defRPr sz="5500" b="1" i="0">
-                <a:solidFill>
-                  <a:srgbClr val="FFFFFF"/>
-                </a:solidFill>
-                <a:latin typeface="Arial Black"/>
-              </a:defRPr>
-            </a:pPr>
-            <a:r>
-              <a:t>BEARING PEACE LIKE A PURE, HOLY DOVE</a:t>
-            </a:r>
-          </a:p>
-          <a:p>
-            <a:pPr algn="ctr">
-              <a:lnSpc>
-                <a:spcPct val="105000"/>
-              </a:lnSpc>
-              <a:spcAft>
-                <a:spcPts val="1000"/>
-              </a:spcAft>
-              <a:defRPr sz="5500" b="1" i="0">
-                <a:solidFill>
-                  <a:srgbClr val="FFFFFF"/>
-                </a:solidFill>
-                <a:latin typeface="Arial Black"/>
-              </a:defRPr>
-            </a:pPr>
-            <a:r>
-              <a:t>TO EVERY NATION, EVERY LAND.</a:t>
-            </a:r>
-          </a:p>
-          <a:p>
-            <a:pPr algn="ctr">
-              <a:lnSpc>
-                <a:spcPct val="105000"/>
-              </a:lnSpc>
-              <a:spcAft>
-                <a:spcPts val="1000"/>
-              </a:spcAft>
-              <a:defRPr sz="5500" b="1" i="0">
-                <a:solidFill>
-                  <a:srgbClr val="FFFFFF"/>
-                </a:solidFill>
-                <a:latin typeface="Arial Black"/>
-              </a:defRPr>
-            </a:pPr>
-            <a:r>
-              <a:t>GO MAKE A DIFFERENCE.</a:t>
+            <a:off x="914400" y="1490472"/>
+            <a:ext cx="16459200" cy="7790688"/>
+          </a:xfrm>
+          <a:prstGeom prst="rect">
+            <a:avLst/>
+          </a:prstGeom>
+          <a:noFill/>
+        </p:spPr>
+        <p:txBody>
+          <a:bodyPr wrap="square" lIns="109728" rIns="109728" tIns="73152" bIns="73152">
+            <a:noAutofit/>
+          </a:bodyPr>
+          <a:lstStyle/>
+          <a:p>
+            <a:pPr algn="ctr">
+              <a:spcAft>
+                <a:spcPts val="500"/>
+              </a:spcAft>
+              <a:defRPr sz="1500" b="0" i="1">
+                <a:solidFill>
+                  <a:srgbClr val="D8B4FE"/>
+                </a:solidFill>
+                <a:latin typeface="Georgia"/>
+              </a:defRPr>
+            </a:pPr>
+            <a:r>
+              <a:t>Below: World English Bible (WEB) fallback — verify NABRE on bible.usccb.org.</a:t>
             </a:r>
           </a:p>
         </p:txBody>
@@ -23111,7 +23370,7 @@
             <a:pPr>
               <a:defRPr sz="1300" b="1" i="0">
                 <a:solidFill>
-                  <a:srgbClr val="8C8C91"/>
+                  <a:srgbClr val="F8C66A"/>
                 </a:solidFill>
                 <a:latin typeface="Georgia"/>
               </a:defRPr>
@@ -23127,1470 +23386,17 @@
               </a:spcBef>
               <a:defRPr sz="1200" b="0" i="0">
                 <a:solidFill>
-                  <a:srgbClr val="FFCC4D"/>
-                </a:solidFill>
-                <a:latin typeface="Georgia"/>
-              </a:defRPr>
-            </a:pPr>
-            <a:r>
-              <a:t>Recessional</a:t>
-            </a:r>
-          </a:p>
-        </p:txBody>
-      </p:sp>
-    </p:spTree>
-  </p:cSld>
-  <p:clrMapOvr>
-    <a:masterClrMapping/>
-  </p:clrMapOvr>
-</p:sld>
-</file>
-
-<file path=ppt/slides/slide83.xml><?xml version="1.0" encoding="utf-8"?>
-<p:sld xmlns:a="http://schemas.openxmlformats.org/drawingml/2006/main" xmlns:p="http://schemas.openxmlformats.org/presentationml/2006/main" xmlns:r="http://schemas.openxmlformats.org/officeDocument/2006/relationships">
-  <p:cSld>
-    <p:bg>
-      <p:bgPr>
-        <a:solidFill>
-          <a:srgbClr val="000000"/>
-        </a:solidFill>
-        <a:effectLst/>
-      </p:bgPr>
-    </p:bg>
-    <p:spTree>
-      <p:nvGrpSpPr>
-        <p:cNvPr id="1" name=""/>
-        <p:cNvGrpSpPr/>
-        <p:nvPr/>
-      </p:nvGrpSpPr>
-      <p:grpSpPr/>
-      <p:pic>
-        <p:nvPicPr>
-          <p:cNvPr id="2" name="Picture 1" descr="community_logo.png"/>
-          <p:cNvPicPr>
-            <a:picLocks noChangeAspect="1"/>
-          </p:cNvPicPr>
-          <p:nvPr/>
-        </p:nvPicPr>
-        <p:blipFill>
-          <a:blip r:embed="rId2"/>
-          <a:stretch>
-            <a:fillRect/>
-          </a:stretch>
-        </p:blipFill>
-        <p:spPr>
-          <a:xfrm>
-            <a:off x="914400" y="256032"/>
-            <a:ext cx="387682" cy="384048"/>
-          </a:xfrm>
-          <a:prstGeom prst="rect">
-            <a:avLst/>
-          </a:prstGeom>
-        </p:spPr>
-      </p:pic>
-      <p:sp>
-        <p:nvSpPr>
-          <p:cNvPr id="3" name="TextBox 2"/>
-          <p:cNvSpPr txBox="1"/>
-          <p:nvPr/>
-        </p:nvSpPr>
-        <p:spPr>
-          <a:xfrm>
-            <a:off x="1430098" y="256032"/>
-            <a:ext cx="15943502" cy="384048"/>
-          </a:xfrm>
-          <a:prstGeom prst="rect">
-            <a:avLst/>
-          </a:prstGeom>
-          <a:noFill/>
-        </p:spPr>
-        <p:txBody>
-          <a:bodyPr wrap="square" lIns="109728" rIns="109728" tIns="73152" bIns="73152" anchor="ctr">
-            <a:noAutofit/>
-          </a:bodyPr>
-          <a:lstStyle/>
-          <a:p>
-            <a:pPr algn="l">
-              <a:defRPr sz="1500" b="1" i="0">
-                <a:solidFill>
-                  <a:srgbClr val="FFFFFF"/>
-                </a:solidFill>
-                <a:latin typeface="Georgia"/>
-              </a:defRPr>
-            </a:pPr>
-            <a:r>
-              <a:t>Gwangju Filipino Catholic Community</a:t>
-            </a:r>
-          </a:p>
-        </p:txBody>
-      </p:sp>
-      <p:sp>
-        <p:nvSpPr>
-          <p:cNvPr id="4" name="TextBox 3"/>
-          <p:cNvSpPr txBox="1"/>
-          <p:nvPr/>
-        </p:nvSpPr>
-        <p:spPr>
-          <a:xfrm>
-            <a:off x="0" y="1490472"/>
-            <a:ext cx="18288000" cy="7927848"/>
-          </a:xfrm>
-          <a:prstGeom prst="rect">
-            <a:avLst/>
-          </a:prstGeom>
-          <a:noFill/>
-        </p:spPr>
-        <p:txBody>
-          <a:bodyPr wrap="square" lIns="109728" rIns="109728" tIns="73152" bIns="73152" anchor="ctr">
-            <a:noAutofit/>
-          </a:bodyPr>
-          <a:lstStyle/>
-          <a:p>
-            <a:pPr algn="ctr">
-              <a:lnSpc>
-                <a:spcPct val="105000"/>
-              </a:lnSpc>
-              <a:spcAft>
-                <a:spcPts val="1000"/>
-              </a:spcAft>
-              <a:defRPr sz="5500" b="1" i="0">
-                <a:solidFill>
-                  <a:srgbClr val="FFFFFF"/>
-                </a:solidFill>
-                <a:latin typeface="Arial Black"/>
-              </a:defRPr>
-            </a:pPr>
-            <a:r>
-              <a:t>GO MAKE A DIFFERENCE;</a:t>
-            </a:r>
-          </a:p>
-          <a:p>
-            <a:pPr algn="ctr">
-              <a:lnSpc>
-                <a:spcPct val="105000"/>
-              </a:lnSpc>
-              <a:spcAft>
-                <a:spcPts val="1000"/>
-              </a:spcAft>
-              <a:defRPr sz="5500" b="1" i="0">
-                <a:solidFill>
-                  <a:srgbClr val="FFFFFF"/>
-                </a:solidFill>
-                <a:latin typeface="Arial Black"/>
-              </a:defRPr>
-            </a:pPr>
-            <a:r>
-              <a:t>WE CAN MAKE A DIFFERENCE</a:t>
-            </a:r>
-          </a:p>
-          <a:p>
-            <a:pPr algn="ctr">
-              <a:lnSpc>
-                <a:spcPct val="105000"/>
-              </a:lnSpc>
-              <a:spcAft>
-                <a:spcPts val="1000"/>
-              </a:spcAft>
-              <a:defRPr sz="5500" b="1" i="0">
-                <a:solidFill>
-                  <a:srgbClr val="FFFFFF"/>
-                </a:solidFill>
-                <a:latin typeface="Arial Black"/>
-              </a:defRPr>
-            </a:pPr>
-            <a:r>
-              <a:t>IN THE NAME OF THE LORD.</a:t>
-            </a:r>
-          </a:p>
-        </p:txBody>
-      </p:sp>
-      <p:sp>
-        <p:nvSpPr>
-          <p:cNvPr id="5" name="TextBox 4"/>
-          <p:cNvSpPr txBox="1"/>
-          <p:nvPr/>
-        </p:nvSpPr>
-        <p:spPr>
-          <a:xfrm>
-            <a:off x="914400" y="9418320"/>
-            <a:ext cx="16459200" cy="777240"/>
-          </a:xfrm>
-          <a:prstGeom prst="rect">
-            <a:avLst/>
-          </a:prstGeom>
-          <a:noFill/>
-        </p:spPr>
-        <p:txBody>
-          <a:bodyPr wrap="square" lIns="109728" rIns="109728" tIns="73152" bIns="73152">
-            <a:noAutofit/>
-          </a:bodyPr>
-          <a:lstStyle/>
-          <a:p>
-            <a:pPr>
-              <a:defRPr sz="1300" b="1" i="0">
-                <a:solidFill>
-                  <a:srgbClr val="8C8C91"/>
-                </a:solidFill>
-                <a:latin typeface="Georgia"/>
-              </a:defRPr>
-            </a:pPr>
-            <a:r>
-              <a:t>Gwangju Filipino Catholic Community</a:t>
-            </a:r>
-          </a:p>
-          <a:p>
-            <a:pPr>
-              <a:spcBef>
-                <a:spcPts val="200"/>
-              </a:spcBef>
-              <a:defRPr sz="1200" b="0" i="0">
-                <a:solidFill>
-                  <a:srgbClr val="FFCC4D"/>
-                </a:solidFill>
-                <a:latin typeface="Georgia"/>
-              </a:defRPr>
-            </a:pPr>
-            <a:r>
-              <a:t>Recessional</a:t>
-            </a:r>
-          </a:p>
-        </p:txBody>
-      </p:sp>
-    </p:spTree>
-  </p:cSld>
-  <p:clrMapOvr>
-    <a:masterClrMapping/>
-  </p:clrMapOvr>
-</p:sld>
-</file>
-
-<file path=ppt/slides/slide84.xml><?xml version="1.0" encoding="utf-8"?>
-<p:sld xmlns:a="http://schemas.openxmlformats.org/drawingml/2006/main" xmlns:p="http://schemas.openxmlformats.org/presentationml/2006/main" xmlns:r="http://schemas.openxmlformats.org/officeDocument/2006/relationships">
-  <p:cSld>
-    <p:bg>
-      <p:bgPr>
-        <a:solidFill>
-          <a:srgbClr val="000000"/>
-        </a:solidFill>
-        <a:effectLst/>
-      </p:bgPr>
-    </p:bg>
-    <p:spTree>
-      <p:nvGrpSpPr>
-        <p:cNvPr id="1" name=""/>
-        <p:cNvGrpSpPr/>
-        <p:nvPr/>
-      </p:nvGrpSpPr>
-      <p:grpSpPr/>
-      <p:pic>
-        <p:nvPicPr>
-          <p:cNvPr id="2" name="Picture 1" descr="community_logo.png"/>
-          <p:cNvPicPr>
-            <a:picLocks noChangeAspect="1"/>
-          </p:cNvPicPr>
-          <p:nvPr/>
-        </p:nvPicPr>
-        <p:blipFill>
-          <a:blip r:embed="rId2"/>
-          <a:stretch>
-            <a:fillRect/>
-          </a:stretch>
-        </p:blipFill>
-        <p:spPr>
-          <a:xfrm>
-            <a:off x="914400" y="256032"/>
-            <a:ext cx="387682" cy="384048"/>
-          </a:xfrm>
-          <a:prstGeom prst="rect">
-            <a:avLst/>
-          </a:prstGeom>
-        </p:spPr>
-      </p:pic>
-      <p:sp>
-        <p:nvSpPr>
-          <p:cNvPr id="3" name="TextBox 2"/>
-          <p:cNvSpPr txBox="1"/>
-          <p:nvPr/>
-        </p:nvSpPr>
-        <p:spPr>
-          <a:xfrm>
-            <a:off x="1430098" y="256032"/>
-            <a:ext cx="15943502" cy="384048"/>
-          </a:xfrm>
-          <a:prstGeom prst="rect">
-            <a:avLst/>
-          </a:prstGeom>
-          <a:noFill/>
-        </p:spPr>
-        <p:txBody>
-          <a:bodyPr wrap="square" lIns="109728" rIns="109728" tIns="73152" bIns="73152" anchor="ctr">
-            <a:noAutofit/>
-          </a:bodyPr>
-          <a:lstStyle/>
-          <a:p>
-            <a:pPr algn="l">
-              <a:defRPr sz="1500" b="1" i="0">
-                <a:solidFill>
-                  <a:srgbClr val="FFFFFF"/>
-                </a:solidFill>
-                <a:latin typeface="Georgia"/>
-              </a:defRPr>
-            </a:pPr>
-            <a:r>
-              <a:t>Gwangju Filipino Catholic Community</a:t>
-            </a:r>
-          </a:p>
-        </p:txBody>
-      </p:sp>
-      <p:sp>
-        <p:nvSpPr>
-          <p:cNvPr id="4" name="TextBox 3"/>
-          <p:cNvSpPr txBox="1"/>
-          <p:nvPr/>
-        </p:nvSpPr>
-        <p:spPr>
-          <a:xfrm>
-            <a:off x="0" y="1490472"/>
-            <a:ext cx="18288000" cy="7927848"/>
-          </a:xfrm>
-          <a:prstGeom prst="rect">
-            <a:avLst/>
-          </a:prstGeom>
-          <a:noFill/>
-        </p:spPr>
-        <p:txBody>
-          <a:bodyPr wrap="square" lIns="109728" rIns="109728" tIns="73152" bIns="73152" anchor="ctr">
-            <a:noAutofit/>
-          </a:bodyPr>
-          <a:lstStyle/>
-          <a:p>
-            <a:pPr algn="ctr">
-              <a:lnSpc>
-                <a:spcPct val="105000"/>
-              </a:lnSpc>
-              <a:spcAft>
-                <a:spcPts val="1000"/>
-              </a:spcAft>
-              <a:defRPr sz="5500" b="1" i="0">
-                <a:solidFill>
-                  <a:srgbClr val="FFFFFF"/>
-                </a:solidFill>
-                <a:latin typeface="Arial Black"/>
-              </a:defRPr>
-            </a:pPr>
-            <a:r>
-              <a:t>WE ARE THE SALT OF THE EARTH,</a:t>
-            </a:r>
-          </a:p>
-          <a:p>
-            <a:pPr algn="ctr">
-              <a:lnSpc>
-                <a:spcPct val="105000"/>
-              </a:lnSpc>
-              <a:spcAft>
-                <a:spcPts val="1000"/>
-              </a:spcAft>
-              <a:defRPr sz="5500" b="1" i="0">
-                <a:solidFill>
-                  <a:srgbClr val="FFFFFF"/>
-                </a:solidFill>
-                <a:latin typeface="Arial Black"/>
-              </a:defRPr>
-            </a:pPr>
-            <a:r>
-              <a:t>CALLED TO GIVE THE WORLD A NEW TASTE:</a:t>
-            </a:r>
-          </a:p>
-          <a:p>
-            <a:pPr algn="ctr">
-              <a:lnSpc>
-                <a:spcPct val="105000"/>
-              </a:lnSpc>
-              <a:spcAft>
-                <a:spcPts val="1000"/>
-              </a:spcAft>
-              <a:defRPr sz="5500" b="1" i="0">
-                <a:solidFill>
-                  <a:srgbClr val="FFFFFF"/>
-                </a:solidFill>
-                <a:latin typeface="Arial Black"/>
-              </a:defRPr>
-            </a:pPr>
-            <a:r>
-              <a:t>LOVE, JUSTICE, MERCY, AND PRAISE.</a:t>
-            </a:r>
-          </a:p>
-        </p:txBody>
-      </p:sp>
-      <p:sp>
-        <p:nvSpPr>
-          <p:cNvPr id="5" name="TextBox 4"/>
-          <p:cNvSpPr txBox="1"/>
-          <p:nvPr/>
-        </p:nvSpPr>
-        <p:spPr>
-          <a:xfrm>
-            <a:off x="914400" y="9418320"/>
-            <a:ext cx="16459200" cy="777240"/>
-          </a:xfrm>
-          <a:prstGeom prst="rect">
-            <a:avLst/>
-          </a:prstGeom>
-          <a:noFill/>
-        </p:spPr>
-        <p:txBody>
-          <a:bodyPr wrap="square" lIns="109728" rIns="109728" tIns="73152" bIns="73152">
-            <a:noAutofit/>
-          </a:bodyPr>
-          <a:lstStyle/>
-          <a:p>
-            <a:pPr>
-              <a:defRPr sz="1300" b="1" i="0">
-                <a:solidFill>
-                  <a:srgbClr val="8C8C91"/>
-                </a:solidFill>
-                <a:latin typeface="Georgia"/>
-              </a:defRPr>
-            </a:pPr>
-            <a:r>
-              <a:t>Gwangju Filipino Catholic Community</a:t>
-            </a:r>
-          </a:p>
-          <a:p>
-            <a:pPr>
-              <a:spcBef>
-                <a:spcPts val="200"/>
-              </a:spcBef>
-              <a:defRPr sz="1200" b="0" i="0">
-                <a:solidFill>
-                  <a:srgbClr val="FFCC4D"/>
-                </a:solidFill>
-                <a:latin typeface="Georgia"/>
-              </a:defRPr>
-            </a:pPr>
-            <a:r>
-              <a:t>Recessional</a:t>
-            </a:r>
-          </a:p>
-        </p:txBody>
-      </p:sp>
-    </p:spTree>
-  </p:cSld>
-  <p:clrMapOvr>
-    <a:masterClrMapping/>
-  </p:clrMapOvr>
-</p:sld>
-</file>
-
-<file path=ppt/slides/slide85.xml><?xml version="1.0" encoding="utf-8"?>
-<p:sld xmlns:a="http://schemas.openxmlformats.org/drawingml/2006/main" xmlns:p="http://schemas.openxmlformats.org/presentationml/2006/main" xmlns:r="http://schemas.openxmlformats.org/officeDocument/2006/relationships">
-  <p:cSld>
-    <p:bg>
-      <p:bgPr>
-        <a:solidFill>
-          <a:srgbClr val="000000"/>
-        </a:solidFill>
-        <a:effectLst/>
-      </p:bgPr>
-    </p:bg>
-    <p:spTree>
-      <p:nvGrpSpPr>
-        <p:cNvPr id="1" name=""/>
-        <p:cNvGrpSpPr/>
-        <p:nvPr/>
-      </p:nvGrpSpPr>
-      <p:grpSpPr/>
-      <p:pic>
-        <p:nvPicPr>
-          <p:cNvPr id="2" name="Picture 1" descr="community_logo.png"/>
-          <p:cNvPicPr>
-            <a:picLocks noChangeAspect="1"/>
-          </p:cNvPicPr>
-          <p:nvPr/>
-        </p:nvPicPr>
-        <p:blipFill>
-          <a:blip r:embed="rId2"/>
-          <a:stretch>
-            <a:fillRect/>
-          </a:stretch>
-        </p:blipFill>
-        <p:spPr>
-          <a:xfrm>
-            <a:off x="914400" y="256032"/>
-            <a:ext cx="387682" cy="384048"/>
-          </a:xfrm>
-          <a:prstGeom prst="rect">
-            <a:avLst/>
-          </a:prstGeom>
-        </p:spPr>
-      </p:pic>
-      <p:sp>
-        <p:nvSpPr>
-          <p:cNvPr id="3" name="TextBox 2"/>
-          <p:cNvSpPr txBox="1"/>
-          <p:nvPr/>
-        </p:nvSpPr>
-        <p:spPr>
-          <a:xfrm>
-            <a:off x="1430098" y="256032"/>
-            <a:ext cx="15943502" cy="384048"/>
-          </a:xfrm>
-          <a:prstGeom prst="rect">
-            <a:avLst/>
-          </a:prstGeom>
-          <a:noFill/>
-        </p:spPr>
-        <p:txBody>
-          <a:bodyPr wrap="square" lIns="109728" rIns="109728" tIns="73152" bIns="73152" anchor="ctr">
-            <a:noAutofit/>
-          </a:bodyPr>
-          <a:lstStyle/>
-          <a:p>
-            <a:pPr algn="l">
-              <a:defRPr sz="1500" b="1" i="0">
-                <a:solidFill>
-                  <a:srgbClr val="FFFFFF"/>
-                </a:solidFill>
-                <a:latin typeface="Georgia"/>
-              </a:defRPr>
-            </a:pPr>
-            <a:r>
-              <a:t>Gwangju Filipino Catholic Community</a:t>
-            </a:r>
-          </a:p>
-        </p:txBody>
-      </p:sp>
-      <p:sp>
-        <p:nvSpPr>
-          <p:cNvPr id="4" name="TextBox 3"/>
-          <p:cNvSpPr txBox="1"/>
-          <p:nvPr/>
-        </p:nvSpPr>
-        <p:spPr>
-          <a:xfrm>
-            <a:off x="0" y="1490472"/>
-            <a:ext cx="18288000" cy="7927848"/>
-          </a:xfrm>
-          <a:prstGeom prst="rect">
-            <a:avLst/>
-          </a:prstGeom>
-          <a:noFill/>
-        </p:spPr>
-        <p:txBody>
-          <a:bodyPr wrap="square" lIns="109728" rIns="109728" tIns="73152" bIns="73152" anchor="ctr">
-            <a:noAutofit/>
-          </a:bodyPr>
-          <a:lstStyle/>
-          <a:p>
-            <a:pPr algn="ctr">
-              <a:lnSpc>
-                <a:spcPct val="105000"/>
-              </a:lnSpc>
-              <a:spcAft>
-                <a:spcPts val="1000"/>
-              </a:spcAft>
-              <a:defRPr sz="5500" b="1" i="0">
-                <a:solidFill>
-                  <a:srgbClr val="FFFFFF"/>
-                </a:solidFill>
-                <a:latin typeface="Arial Black"/>
-              </a:defRPr>
-            </a:pPr>
-            <a:r>
-              <a:t>GO MAKE A DIFFERENCE.</a:t>
-            </a:r>
-          </a:p>
-          <a:p>
-            <a:pPr algn="ctr">
-              <a:lnSpc>
-                <a:spcPct val="105000"/>
-              </a:lnSpc>
-              <a:spcAft>
-                <a:spcPts val="1000"/>
-              </a:spcAft>
-              <a:defRPr sz="5500" b="1" i="0">
-                <a:solidFill>
-                  <a:srgbClr val="FFFFFF"/>
-                </a:solidFill>
-                <a:latin typeface="Arial Black"/>
-              </a:defRPr>
-            </a:pPr>
-            <a:r>
-              <a:t>GO MAKE A DIFFERENCE;</a:t>
-            </a:r>
-          </a:p>
-          <a:p>
-            <a:pPr algn="ctr">
-              <a:lnSpc>
-                <a:spcPct val="105000"/>
-              </a:lnSpc>
-              <a:spcAft>
-                <a:spcPts val="1000"/>
-              </a:spcAft>
-              <a:defRPr sz="5500" b="1" i="0">
-                <a:solidFill>
-                  <a:srgbClr val="FFFFFF"/>
-                </a:solidFill>
-                <a:latin typeface="Arial Black"/>
-              </a:defRPr>
-            </a:pPr>
-            <a:r>
-              <a:t>WE CAN MAKE A DIFFERENCE</a:t>
-            </a:r>
-          </a:p>
-        </p:txBody>
-      </p:sp>
-      <p:sp>
-        <p:nvSpPr>
-          <p:cNvPr id="5" name="TextBox 4"/>
-          <p:cNvSpPr txBox="1"/>
-          <p:nvPr/>
-        </p:nvSpPr>
-        <p:spPr>
-          <a:xfrm>
-            <a:off x="914400" y="9418320"/>
-            <a:ext cx="16459200" cy="777240"/>
-          </a:xfrm>
-          <a:prstGeom prst="rect">
-            <a:avLst/>
-          </a:prstGeom>
-          <a:noFill/>
-        </p:spPr>
-        <p:txBody>
-          <a:bodyPr wrap="square" lIns="109728" rIns="109728" tIns="73152" bIns="73152">
-            <a:noAutofit/>
-          </a:bodyPr>
-          <a:lstStyle/>
-          <a:p>
-            <a:pPr>
-              <a:defRPr sz="1300" b="1" i="0">
-                <a:solidFill>
-                  <a:srgbClr val="8C8C91"/>
-                </a:solidFill>
-                <a:latin typeface="Georgia"/>
-              </a:defRPr>
-            </a:pPr>
-            <a:r>
-              <a:t>Gwangju Filipino Catholic Community</a:t>
-            </a:r>
-          </a:p>
-          <a:p>
-            <a:pPr>
-              <a:spcBef>
-                <a:spcPts val="200"/>
-              </a:spcBef>
-              <a:defRPr sz="1200" b="0" i="0">
-                <a:solidFill>
-                  <a:srgbClr val="FFCC4D"/>
-                </a:solidFill>
-                <a:latin typeface="Georgia"/>
-              </a:defRPr>
-            </a:pPr>
-            <a:r>
-              <a:t>Recessional</a:t>
-            </a:r>
-          </a:p>
-        </p:txBody>
-      </p:sp>
-    </p:spTree>
-  </p:cSld>
-  <p:clrMapOvr>
-    <a:masterClrMapping/>
-  </p:clrMapOvr>
-</p:sld>
-</file>
-
-<file path=ppt/slides/slide86.xml><?xml version="1.0" encoding="utf-8"?>
-<p:sld xmlns:a="http://schemas.openxmlformats.org/drawingml/2006/main" xmlns:p="http://schemas.openxmlformats.org/presentationml/2006/main" xmlns:r="http://schemas.openxmlformats.org/officeDocument/2006/relationships">
-  <p:cSld>
-    <p:bg>
-      <p:bgPr>
-        <a:solidFill>
-          <a:srgbClr val="000000"/>
-        </a:solidFill>
-        <a:effectLst/>
-      </p:bgPr>
-    </p:bg>
-    <p:spTree>
-      <p:nvGrpSpPr>
-        <p:cNvPr id="1" name=""/>
-        <p:cNvGrpSpPr/>
-        <p:nvPr/>
-      </p:nvGrpSpPr>
-      <p:grpSpPr/>
-      <p:pic>
-        <p:nvPicPr>
-          <p:cNvPr id="2" name="Picture 1" descr="community_logo.png"/>
-          <p:cNvPicPr>
-            <a:picLocks noChangeAspect="1"/>
-          </p:cNvPicPr>
-          <p:nvPr/>
-        </p:nvPicPr>
-        <p:blipFill>
-          <a:blip r:embed="rId2"/>
-          <a:stretch>
-            <a:fillRect/>
-          </a:stretch>
-        </p:blipFill>
-        <p:spPr>
-          <a:xfrm>
-            <a:off x="914400" y="256032"/>
-            <a:ext cx="387682" cy="384048"/>
-          </a:xfrm>
-          <a:prstGeom prst="rect">
-            <a:avLst/>
-          </a:prstGeom>
-        </p:spPr>
-      </p:pic>
-      <p:sp>
-        <p:nvSpPr>
-          <p:cNvPr id="3" name="TextBox 2"/>
-          <p:cNvSpPr txBox="1"/>
-          <p:nvPr/>
-        </p:nvSpPr>
-        <p:spPr>
-          <a:xfrm>
-            <a:off x="1430098" y="256032"/>
-            <a:ext cx="15943502" cy="384048"/>
-          </a:xfrm>
-          <a:prstGeom prst="rect">
-            <a:avLst/>
-          </a:prstGeom>
-          <a:noFill/>
-        </p:spPr>
-        <p:txBody>
-          <a:bodyPr wrap="square" lIns="109728" rIns="109728" tIns="73152" bIns="73152" anchor="ctr">
-            <a:noAutofit/>
-          </a:bodyPr>
-          <a:lstStyle/>
-          <a:p>
-            <a:pPr algn="l">
-              <a:defRPr sz="1500" b="1" i="0">
-                <a:solidFill>
-                  <a:srgbClr val="FFFFFF"/>
-                </a:solidFill>
-                <a:latin typeface="Georgia"/>
-              </a:defRPr>
-            </a:pPr>
-            <a:r>
-              <a:t>Gwangju Filipino Catholic Community</a:t>
-            </a:r>
-          </a:p>
-        </p:txBody>
-      </p:sp>
-      <p:sp>
-        <p:nvSpPr>
-          <p:cNvPr id="4" name="TextBox 3"/>
-          <p:cNvSpPr txBox="1"/>
-          <p:nvPr/>
-        </p:nvSpPr>
-        <p:spPr>
-          <a:xfrm>
-            <a:off x="0" y="1490472"/>
-            <a:ext cx="18288000" cy="7927848"/>
-          </a:xfrm>
-          <a:prstGeom prst="rect">
-            <a:avLst/>
-          </a:prstGeom>
-          <a:noFill/>
-        </p:spPr>
-        <p:txBody>
-          <a:bodyPr wrap="square" lIns="109728" rIns="109728" tIns="73152" bIns="73152" anchor="ctr">
-            <a:noAutofit/>
-          </a:bodyPr>
-          <a:lstStyle/>
-          <a:p>
-            <a:pPr algn="ctr">
-              <a:lnSpc>
-                <a:spcPct val="105000"/>
-              </a:lnSpc>
-              <a:spcAft>
-                <a:spcPts val="1000"/>
-              </a:spcAft>
-              <a:defRPr sz="5500" b="1" i="0">
-                <a:solidFill>
-                  <a:srgbClr val="FFFFFF"/>
-                </a:solidFill>
-                <a:latin typeface="Arial Black"/>
-              </a:defRPr>
-            </a:pPr>
-            <a:r>
-              <a:t>IN THE NAME OF THE LORD.</a:t>
-            </a:r>
-          </a:p>
-          <a:p>
-            <a:pPr algn="ctr">
-              <a:lnSpc>
-                <a:spcPct val="105000"/>
-              </a:lnSpc>
-              <a:spcAft>
-                <a:spcPts val="1000"/>
-              </a:spcAft>
-              <a:defRPr sz="5500" b="1" i="0">
-                <a:solidFill>
-                  <a:srgbClr val="FFFFFF"/>
-                </a:solidFill>
-                <a:latin typeface="Arial Black"/>
-              </a:defRPr>
-            </a:pPr>
-            <a:r>
-              <a:t>WE ARE A LIGHT ON THE HILL,</a:t>
-            </a:r>
-          </a:p>
-          <a:p>
-            <a:pPr algn="ctr">
-              <a:lnSpc>
-                <a:spcPct val="105000"/>
-              </a:lnSpc>
-              <a:spcAft>
-                <a:spcPts val="1000"/>
-              </a:spcAft>
-              <a:defRPr sz="5500" b="1" i="0">
-                <a:solidFill>
-                  <a:srgbClr val="FFFFFF"/>
-                </a:solidFill>
-                <a:latin typeface="Arial Black"/>
-              </a:defRPr>
-            </a:pPr>
-            <a:r>
-              <a:t>MAY OUR GOOD DEEDS SHINE, LORD, UNTIL</a:t>
-            </a:r>
-          </a:p>
-        </p:txBody>
-      </p:sp>
-      <p:sp>
-        <p:nvSpPr>
-          <p:cNvPr id="5" name="TextBox 4"/>
-          <p:cNvSpPr txBox="1"/>
-          <p:nvPr/>
-        </p:nvSpPr>
-        <p:spPr>
-          <a:xfrm>
-            <a:off x="914400" y="9418320"/>
-            <a:ext cx="16459200" cy="777240"/>
-          </a:xfrm>
-          <a:prstGeom prst="rect">
-            <a:avLst/>
-          </a:prstGeom>
-          <a:noFill/>
-        </p:spPr>
-        <p:txBody>
-          <a:bodyPr wrap="square" lIns="109728" rIns="109728" tIns="73152" bIns="73152">
-            <a:noAutofit/>
-          </a:bodyPr>
-          <a:lstStyle/>
-          <a:p>
-            <a:pPr>
-              <a:defRPr sz="1300" b="1" i="0">
-                <a:solidFill>
-                  <a:srgbClr val="8C8C91"/>
-                </a:solidFill>
-                <a:latin typeface="Georgia"/>
-              </a:defRPr>
-            </a:pPr>
-            <a:r>
-              <a:t>Gwangju Filipino Catholic Community</a:t>
-            </a:r>
-          </a:p>
-          <a:p>
-            <a:pPr>
-              <a:spcBef>
-                <a:spcPts val="200"/>
-              </a:spcBef>
-              <a:defRPr sz="1200" b="0" i="0">
-                <a:solidFill>
-                  <a:srgbClr val="FFCC4D"/>
-                </a:solidFill>
-                <a:latin typeface="Georgia"/>
-              </a:defRPr>
-            </a:pPr>
-            <a:r>
-              <a:t>Recessional</a:t>
-            </a:r>
-          </a:p>
-        </p:txBody>
-      </p:sp>
-    </p:spTree>
-  </p:cSld>
-  <p:clrMapOvr>
-    <a:masterClrMapping/>
-  </p:clrMapOvr>
-</p:sld>
-</file>
-
-<file path=ppt/slides/slide87.xml><?xml version="1.0" encoding="utf-8"?>
-<p:sld xmlns:a="http://schemas.openxmlformats.org/drawingml/2006/main" xmlns:p="http://schemas.openxmlformats.org/presentationml/2006/main" xmlns:r="http://schemas.openxmlformats.org/officeDocument/2006/relationships">
-  <p:cSld>
-    <p:bg>
-      <p:bgPr>
-        <a:solidFill>
-          <a:srgbClr val="000000"/>
-        </a:solidFill>
-        <a:effectLst/>
-      </p:bgPr>
-    </p:bg>
-    <p:spTree>
-      <p:nvGrpSpPr>
-        <p:cNvPr id="1" name=""/>
-        <p:cNvGrpSpPr/>
-        <p:nvPr/>
-      </p:nvGrpSpPr>
-      <p:grpSpPr/>
-      <p:pic>
-        <p:nvPicPr>
-          <p:cNvPr id="2" name="Picture 1" descr="community_logo.png"/>
-          <p:cNvPicPr>
-            <a:picLocks noChangeAspect="1"/>
-          </p:cNvPicPr>
-          <p:nvPr/>
-        </p:nvPicPr>
-        <p:blipFill>
-          <a:blip r:embed="rId2"/>
-          <a:stretch>
-            <a:fillRect/>
-          </a:stretch>
-        </p:blipFill>
-        <p:spPr>
-          <a:xfrm>
-            <a:off x="914400" y="256032"/>
-            <a:ext cx="387682" cy="384048"/>
-          </a:xfrm>
-          <a:prstGeom prst="rect">
-            <a:avLst/>
-          </a:prstGeom>
-        </p:spPr>
-      </p:pic>
-      <p:sp>
-        <p:nvSpPr>
-          <p:cNvPr id="3" name="TextBox 2"/>
-          <p:cNvSpPr txBox="1"/>
-          <p:nvPr/>
-        </p:nvSpPr>
-        <p:spPr>
-          <a:xfrm>
-            <a:off x="1430098" y="256032"/>
-            <a:ext cx="15943502" cy="384048"/>
-          </a:xfrm>
-          <a:prstGeom prst="rect">
-            <a:avLst/>
-          </a:prstGeom>
-          <a:noFill/>
-        </p:spPr>
-        <p:txBody>
-          <a:bodyPr wrap="square" lIns="109728" rIns="109728" tIns="73152" bIns="73152" anchor="ctr">
-            <a:noAutofit/>
-          </a:bodyPr>
-          <a:lstStyle/>
-          <a:p>
-            <a:pPr algn="l">
-              <a:defRPr sz="1500" b="1" i="0">
-                <a:solidFill>
-                  <a:srgbClr val="FFFFFF"/>
-                </a:solidFill>
-                <a:latin typeface="Georgia"/>
-              </a:defRPr>
-            </a:pPr>
-            <a:r>
-              <a:t>Gwangju Filipino Catholic Community</a:t>
-            </a:r>
-          </a:p>
-        </p:txBody>
-      </p:sp>
-      <p:sp>
-        <p:nvSpPr>
-          <p:cNvPr id="4" name="TextBox 3"/>
-          <p:cNvSpPr txBox="1"/>
-          <p:nvPr/>
-        </p:nvSpPr>
-        <p:spPr>
-          <a:xfrm>
-            <a:off x="0" y="1490472"/>
-            <a:ext cx="18288000" cy="7927848"/>
-          </a:xfrm>
-          <a:prstGeom prst="rect">
-            <a:avLst/>
-          </a:prstGeom>
-          <a:noFill/>
-        </p:spPr>
-        <p:txBody>
-          <a:bodyPr wrap="square" lIns="109728" rIns="109728" tIns="73152" bIns="73152" anchor="ctr">
-            <a:noAutofit/>
-          </a:bodyPr>
-          <a:lstStyle/>
-          <a:p>
-            <a:pPr algn="ctr">
-              <a:lnSpc>
-                <a:spcPct val="105000"/>
-              </a:lnSpc>
-              <a:spcAft>
-                <a:spcPts val="1000"/>
-              </a:spcAft>
-              <a:defRPr sz="5500" b="1" i="0">
-                <a:solidFill>
-                  <a:srgbClr val="FFFFFF"/>
-                </a:solidFill>
-                <a:latin typeface="Arial Black"/>
-              </a:defRPr>
-            </a:pPr>
-            <a:r>
-              <a:t>ALL KNOW YOUR KINGDOM IS NEAR.</a:t>
-            </a:r>
-          </a:p>
-          <a:p>
-            <a:pPr algn="ctr">
-              <a:lnSpc>
-                <a:spcPct val="105000"/>
-              </a:lnSpc>
-              <a:spcAft>
-                <a:spcPts val="1000"/>
-              </a:spcAft>
-              <a:defRPr sz="5500" b="1" i="0">
-                <a:solidFill>
-                  <a:srgbClr val="FFFFFF"/>
-                </a:solidFill>
-                <a:latin typeface="Arial Black"/>
-              </a:defRPr>
-            </a:pPr>
-            <a:r>
-              <a:t>GO MAKE A DIFFERENCE.</a:t>
-            </a:r>
-          </a:p>
-        </p:txBody>
-      </p:sp>
-      <p:sp>
-        <p:nvSpPr>
-          <p:cNvPr id="5" name="TextBox 4"/>
-          <p:cNvSpPr txBox="1"/>
-          <p:nvPr/>
-        </p:nvSpPr>
-        <p:spPr>
-          <a:xfrm>
-            <a:off x="914400" y="9418320"/>
-            <a:ext cx="16459200" cy="777240"/>
-          </a:xfrm>
-          <a:prstGeom prst="rect">
-            <a:avLst/>
-          </a:prstGeom>
-          <a:noFill/>
-        </p:spPr>
-        <p:txBody>
-          <a:bodyPr wrap="square" lIns="109728" rIns="109728" tIns="73152" bIns="73152">
-            <a:noAutofit/>
-          </a:bodyPr>
-          <a:lstStyle/>
-          <a:p>
-            <a:pPr>
-              <a:defRPr sz="1300" b="1" i="0">
-                <a:solidFill>
-                  <a:srgbClr val="8C8C91"/>
-                </a:solidFill>
-                <a:latin typeface="Georgia"/>
-              </a:defRPr>
-            </a:pPr>
-            <a:r>
-              <a:t>Gwangju Filipino Catholic Community</a:t>
-            </a:r>
-          </a:p>
-          <a:p>
-            <a:pPr>
-              <a:spcBef>
-                <a:spcPts val="200"/>
-              </a:spcBef>
-              <a:defRPr sz="1200" b="0" i="0">
-                <a:solidFill>
-                  <a:srgbClr val="FFCC4D"/>
-                </a:solidFill>
-                <a:latin typeface="Georgia"/>
-              </a:defRPr>
-            </a:pPr>
-            <a:r>
-              <a:t>Recessional</a:t>
-            </a:r>
-          </a:p>
-        </p:txBody>
-      </p:sp>
-    </p:spTree>
-  </p:cSld>
-  <p:clrMapOvr>
-    <a:masterClrMapping/>
-  </p:clrMapOvr>
-</p:sld>
-</file>
-
-<file path=ppt/slides/slide88.xml><?xml version="1.0" encoding="utf-8"?>
-<p:sld xmlns:a="http://schemas.openxmlformats.org/drawingml/2006/main" xmlns:p="http://schemas.openxmlformats.org/presentationml/2006/main" xmlns:r="http://schemas.openxmlformats.org/officeDocument/2006/relationships">
-  <p:cSld>
-    <p:spTree>
-      <p:nvGrpSpPr>
-        <p:cNvPr id="1" name=""/>
-        <p:cNvGrpSpPr/>
-        <p:nvPr/>
-      </p:nvGrpSpPr>
-      <p:grpSpPr/>
-      <p:pic>
-        <p:nvPicPr>
-          <p:cNvPr id="2" name="Picture 1" descr="GFCC24May2026_Eastertide_16x9.png"/>
-          <p:cNvPicPr>
-            <a:picLocks noChangeAspect="1"/>
-          </p:cNvPicPr>
-          <p:nvPr/>
-        </p:nvPicPr>
-        <p:blipFill>
-          <a:blip r:embed="rId2"/>
-          <a:stretch>
-            <a:fillRect/>
-          </a:stretch>
-        </p:blipFill>
-        <p:spPr>
-          <a:xfrm>
-            <a:off x="0" y="0"/>
-            <a:ext cx="18288000" cy="10287000"/>
-          </a:xfrm>
-          <a:prstGeom prst="rect">
-            <a:avLst/>
-          </a:prstGeom>
-        </p:spPr>
-      </p:pic>
-      <p:pic>
-        <p:nvPicPr>
-          <p:cNvPr id="3" name="Picture 2" descr="community_logo.png"/>
-          <p:cNvPicPr>
-            <a:picLocks noChangeAspect="1"/>
-          </p:cNvPicPr>
-          <p:nvPr/>
-        </p:nvPicPr>
-        <p:blipFill>
-          <a:blip r:embed="rId3"/>
-          <a:stretch>
-            <a:fillRect/>
-          </a:stretch>
-        </p:blipFill>
-        <p:spPr>
-          <a:xfrm>
-            <a:off x="914400" y="256032"/>
-            <a:ext cx="387682" cy="384048"/>
-          </a:xfrm>
-          <a:prstGeom prst="rect">
-            <a:avLst/>
-          </a:prstGeom>
-        </p:spPr>
-      </p:pic>
-      <p:sp>
-        <p:nvSpPr>
-          <p:cNvPr id="4" name="TextBox 3"/>
-          <p:cNvSpPr txBox="1"/>
-          <p:nvPr/>
-        </p:nvSpPr>
-        <p:spPr>
-          <a:xfrm>
-            <a:off x="1430098" y="256032"/>
-            <a:ext cx="15943502" cy="384048"/>
-          </a:xfrm>
-          <a:prstGeom prst="rect">
-            <a:avLst/>
-          </a:prstGeom>
-          <a:noFill/>
-        </p:spPr>
-        <p:txBody>
-          <a:bodyPr wrap="square" lIns="109728" rIns="109728" tIns="73152" bIns="73152" anchor="ctr">
-            <a:noAutofit/>
-          </a:bodyPr>
-          <a:lstStyle/>
-          <a:p>
-            <a:pPr algn="l">
-              <a:defRPr sz="1500" b="1" i="0">
-                <a:solidFill>
-                  <a:srgbClr val="FFFFFF"/>
-                </a:solidFill>
-                <a:latin typeface="Georgia"/>
-              </a:defRPr>
-            </a:pPr>
-            <a:r>
-              <a:t>Gwangju Filipino Catholic Community</a:t>
-            </a:r>
-          </a:p>
-        </p:txBody>
-      </p:sp>
-      <p:sp>
-        <p:nvSpPr>
-          <p:cNvPr id="5" name="TextBox 4"/>
-          <p:cNvSpPr txBox="1"/>
-          <p:nvPr/>
-        </p:nvSpPr>
-        <p:spPr>
-          <a:xfrm>
-            <a:off x="914400" y="1810512"/>
-            <a:ext cx="16459200" cy="5943600"/>
-          </a:xfrm>
-          <a:prstGeom prst="rect">
-            <a:avLst/>
-          </a:prstGeom>
-          <a:noFill/>
-        </p:spPr>
-        <p:txBody>
-          <a:bodyPr wrap="square" lIns="109728" rIns="109728" tIns="73152" bIns="73152">
-            <a:noAutofit/>
-          </a:bodyPr>
-          <a:lstStyle/>
-          <a:p>
-            <a:pPr>
-              <a:spcAft>
-                <a:spcPts val="300"/>
-              </a:spcAft>
-              <a:defRPr sz="2100" b="1" i="0">
-                <a:solidFill>
                   <a:srgbClr val="D8B4FE"/>
                 </a:solidFill>
                 <a:latin typeface="Georgia"/>
               </a:defRPr>
             </a:pPr>
             <a:r>
-              <a:t>MASS CELEBRANT:</a:t>
-            </a:r>
-          </a:p>
-          <a:p>
-            <a:pPr>
-              <a:spcAft>
-                <a:spcPts val="300"/>
-              </a:spcAft>
-              <a:defRPr sz="2100" b="0" i="0">
-                <a:solidFill>
-                  <a:srgbClr val="FFFFFF"/>
-                </a:solidFill>
-                <a:latin typeface="Georgia"/>
-              </a:defRPr>
-            </a:pPr>
-            <a:r>
-              <a:t>Rev. Fr. Jonrey Lauron, RCJ</a:t>
-            </a:r>
-          </a:p>
-          <a:p>
-            <a:pPr>
-              <a:spcAft>
-                <a:spcPts val="300"/>
-              </a:spcAft>
-              <a:defRPr sz="2100" b="0" i="0">
-                <a:solidFill>
-                  <a:srgbClr val="FFFFFF"/>
-                </a:solidFill>
-                <a:latin typeface="Georgia"/>
-              </a:defRPr>
-            </a:pPr>
-          </a:p>
-          <a:p>
-            <a:pPr>
-              <a:spcAft>
-                <a:spcPts val="300"/>
-              </a:spcAft>
-              <a:defRPr sz="2100" b="0" i="0">
-                <a:solidFill>
-                  <a:srgbClr val="FFFFFF"/>
-                </a:solidFill>
-                <a:latin typeface="Georgia"/>
-              </a:defRPr>
-            </a:pPr>
-            <a:r>
-              <a:t>Gwangju</a:t>
-            </a:r>
-            <a:br/>
-            <a:r>
-              <a:t>Filipino</a:t>
-            </a:r>
-            <a:br/>
-            <a:r>
-              <a:t>Catholic</a:t>
-            </a:r>
-            <a:br/>
-            <a:r>
-              <a:t>Community</a:t>
-            </a:r>
-          </a:p>
-          <a:p>
-            <a:pPr>
-              <a:spcAft>
-                <a:spcPts val="300"/>
-              </a:spcAft>
-              <a:defRPr sz="2100" b="0" i="0">
-                <a:solidFill>
-                  <a:srgbClr val="FFFFFF"/>
-                </a:solidFill>
-                <a:latin typeface="Georgia"/>
-              </a:defRPr>
-            </a:pPr>
-          </a:p>
-          <a:p>
-            <a:pPr>
-              <a:spcAft>
-                <a:spcPts val="300"/>
-              </a:spcAft>
-              <a:defRPr sz="2100" b="0" i="0">
-                <a:solidFill>
-                  <a:srgbClr val="FFFFFF"/>
-                </a:solidFill>
-                <a:latin typeface="Georgia"/>
-              </a:defRPr>
-            </a:pPr>
-            <a:r>
-              <a:t>Gospel (John 20:19-23)</a:t>
-            </a:r>
-          </a:p>
-          <a:p>
-            <a:pPr>
-              <a:spcAft>
-                <a:spcPts val="300"/>
-              </a:spcAft>
-              <a:defRPr sz="2100" b="0" i="0">
-                <a:solidFill>
-                  <a:srgbClr val="FFFFFF"/>
-                </a:solidFill>
-                <a:latin typeface="Georgia"/>
-              </a:defRPr>
-            </a:pPr>
-            <a:r>
-              <a:t>“Receive the Holy Spirit!”</a:t>
-            </a:r>
-          </a:p>
-          <a:p>
-            <a:pPr>
-              <a:spcAft>
-                <a:spcPts val="300"/>
-              </a:spcAft>
-              <a:defRPr sz="2100" b="0" i="0">
-                <a:solidFill>
-                  <a:srgbClr val="FFFFFF"/>
-                </a:solidFill>
-                <a:latin typeface="Georgia"/>
-              </a:defRPr>
-            </a:pPr>
-          </a:p>
-          <a:p>
-            <a:pPr>
-              <a:spcAft>
-                <a:spcPts val="300"/>
-              </a:spcAft>
-              <a:defRPr sz="2100" b="0" i="0">
-                <a:solidFill>
-                  <a:srgbClr val="FFFFFF"/>
-                </a:solidFill>
-                <a:latin typeface="Georgia"/>
-              </a:defRPr>
-            </a:pPr>
-            <a:r>
-              <a:t>YEAR A</a:t>
-            </a:r>
-          </a:p>
-          <a:p>
-            <a:pPr>
-              <a:spcAft>
-                <a:spcPts val="300"/>
-              </a:spcAft>
-              <a:defRPr sz="2100" b="0" i="0">
-                <a:solidFill>
-                  <a:srgbClr val="FFFFFF"/>
-                </a:solidFill>
-                <a:latin typeface="Georgia"/>
-              </a:defRPr>
-            </a:pPr>
-            <a:r>
-              <a:t>2026-05-24 · Eastertide</a:t>
-            </a:r>
-          </a:p>
-        </p:txBody>
-      </p:sp>
-      <p:sp>
-        <p:nvSpPr>
-          <p:cNvPr id="6" name="TextBox 5"/>
-          <p:cNvSpPr txBox="1"/>
-          <p:nvPr/>
-        </p:nvSpPr>
-        <p:spPr>
-          <a:xfrm>
-            <a:off x="914400" y="9418320"/>
-            <a:ext cx="16459200" cy="777240"/>
-          </a:xfrm>
-          <a:prstGeom prst="rect">
-            <a:avLst/>
-          </a:prstGeom>
-          <a:noFill/>
-        </p:spPr>
-        <p:txBody>
-          <a:bodyPr wrap="square" lIns="109728" rIns="109728" tIns="73152" bIns="73152">
-            <a:noAutofit/>
-          </a:bodyPr>
-          <a:lstStyle/>
-          <a:p>
-            <a:pPr>
-              <a:defRPr sz="1300" b="1" i="0">
-                <a:solidFill>
-                  <a:srgbClr val="F8C66A"/>
-                </a:solidFill>
-                <a:latin typeface="Georgia"/>
-              </a:defRPr>
-            </a:pPr>
-            <a:r>
-              <a:t>Gwangju Filipino Catholic Community</a:t>
-            </a:r>
-          </a:p>
-          <a:p>
-            <a:pPr>
-              <a:spcBef>
-                <a:spcPts val="200"/>
-              </a:spcBef>
-              <a:defRPr sz="1200" b="0" i="0">
-                <a:solidFill>
-                  <a:srgbClr val="D8B4FE"/>
-                </a:solidFill>
-                <a:latin typeface="Georgia"/>
-              </a:defRPr>
-            </a:pPr>
-            <a:r>
-              <a:t>Mass poster / divider</a:t>
-            </a:r>
-          </a:p>
-        </p:txBody>
-      </p:sp>
-    </p:spTree>
-  </p:cSld>
-  <p:clrMapOvr>
-    <a:masterClrMapping/>
-  </p:clrMapOvr>
-</p:sld>
-</file>
-
-<file path=ppt/slides/slide89.xml><?xml version="1.0" encoding="utf-8"?>
-<p:sld xmlns:a="http://schemas.openxmlformats.org/drawingml/2006/main" xmlns:p="http://schemas.openxmlformats.org/presentationml/2006/main" xmlns:r="http://schemas.openxmlformats.org/officeDocument/2006/relationships">
-  <p:cSld>
-    <p:spTree>
-      <p:nvGrpSpPr>
-        <p:cNvPr id="1" name=""/>
-        <p:cNvGrpSpPr/>
-        <p:nvPr/>
-      </p:nvGrpSpPr>
-      <p:grpSpPr/>
-      <p:pic>
-        <p:nvPicPr>
-          <p:cNvPr id="2" name="Picture 1" descr="GFCC24May2026_Eastertide_16x9.png"/>
-          <p:cNvPicPr>
-            <a:picLocks noChangeAspect="1"/>
-          </p:cNvPicPr>
-          <p:nvPr/>
-        </p:nvPicPr>
-        <p:blipFill>
-          <a:blip r:embed="rId2"/>
-          <a:stretch>
-            <a:fillRect/>
-          </a:stretch>
-        </p:blipFill>
-        <p:spPr>
-          <a:xfrm>
-            <a:off x="0" y="0"/>
-            <a:ext cx="18288000" cy="10287000"/>
-          </a:xfrm>
-          <a:prstGeom prst="rect">
-            <a:avLst/>
-          </a:prstGeom>
-        </p:spPr>
-      </p:pic>
+              <a:t>Scripture note</a:t>
+            </a:r>
+          </a:p>
+        </p:txBody>
+      </p:sp>
     </p:spTree>
   </p:cSld>
   <p:clrMapOvr>
@@ -24824,183 +23630,6 @@
             </a:pPr>
             <a:r>
               <a:t>Entrance</a:t>
-            </a:r>
-          </a:p>
-        </p:txBody>
-      </p:sp>
-    </p:spTree>
-  </p:cSld>
-  <p:clrMapOvr>
-    <a:masterClrMapping/>
-  </p:clrMapOvr>
-</p:sld>
-</file>
-
-<file path=ppt/slides/slide90.xml><?xml version="1.0" encoding="utf-8"?>
-<p:sld xmlns:a="http://schemas.openxmlformats.org/drawingml/2006/main" xmlns:p="http://schemas.openxmlformats.org/presentationml/2006/main" xmlns:r="http://schemas.openxmlformats.org/officeDocument/2006/relationships">
-  <p:cSld>
-    <p:bg>
-      <p:bgPr>
-        <a:solidFill>
-          <a:srgbClr val="211733"/>
-        </a:solidFill>
-        <a:effectLst/>
-      </p:bgPr>
-    </p:bg>
-    <p:spTree>
-      <p:nvGrpSpPr>
-        <p:cNvPr id="1" name=""/>
-        <p:cNvGrpSpPr/>
-        <p:nvPr/>
-      </p:nvGrpSpPr>
-      <p:grpSpPr/>
-      <p:pic>
-        <p:nvPicPr>
-          <p:cNvPr id="2" name="Picture 1" descr="community_logo.png"/>
-          <p:cNvPicPr>
-            <a:picLocks noChangeAspect="1"/>
-          </p:cNvPicPr>
-          <p:nvPr/>
-        </p:nvPicPr>
-        <p:blipFill>
-          <a:blip r:embed="rId2"/>
-          <a:stretch>
-            <a:fillRect/>
-          </a:stretch>
-        </p:blipFill>
-        <p:spPr>
-          <a:xfrm>
-            <a:off x="914400" y="256032"/>
-            <a:ext cx="387682" cy="384048"/>
-          </a:xfrm>
-          <a:prstGeom prst="rect">
-            <a:avLst/>
-          </a:prstGeom>
-        </p:spPr>
-      </p:pic>
-      <p:sp>
-        <p:nvSpPr>
-          <p:cNvPr id="3" name="TextBox 2"/>
-          <p:cNvSpPr txBox="1"/>
-          <p:nvPr/>
-        </p:nvSpPr>
-        <p:spPr>
-          <a:xfrm>
-            <a:off x="1430098" y="256032"/>
-            <a:ext cx="15943502" cy="384048"/>
-          </a:xfrm>
-          <a:prstGeom prst="rect">
-            <a:avLst/>
-          </a:prstGeom>
-          <a:noFill/>
-        </p:spPr>
-        <p:txBody>
-          <a:bodyPr wrap="square" lIns="109728" rIns="109728" tIns="73152" bIns="73152" anchor="ctr">
-            <a:noAutofit/>
-          </a:bodyPr>
-          <a:lstStyle/>
-          <a:p>
-            <a:pPr algn="l">
-              <a:defRPr sz="1500" b="1" i="0">
-                <a:solidFill>
-                  <a:srgbClr val="FFFFFF"/>
-                </a:solidFill>
-                <a:latin typeface="Georgia"/>
-              </a:defRPr>
-            </a:pPr>
-            <a:r>
-              <a:t>Gwangju Filipino Catholic Community</a:t>
-            </a:r>
-          </a:p>
-        </p:txBody>
-      </p:sp>
-      <p:sp>
-        <p:nvSpPr>
-          <p:cNvPr id="4" name="TextBox 3"/>
-          <p:cNvSpPr txBox="1"/>
-          <p:nvPr/>
-        </p:nvSpPr>
-        <p:spPr>
-          <a:xfrm>
-            <a:off x="914400" y="1490472"/>
-            <a:ext cx="16459200" cy="7790688"/>
-          </a:xfrm>
-          <a:prstGeom prst="rect">
-            <a:avLst/>
-          </a:prstGeom>
-          <a:noFill/>
-        </p:spPr>
-        <p:txBody>
-          <a:bodyPr wrap="square" lIns="109728" rIns="109728" tIns="73152" bIns="73152">
-            <a:noAutofit/>
-          </a:bodyPr>
-          <a:lstStyle/>
-          <a:p>
-            <a:pPr algn="ctr">
-              <a:spcAft>
-                <a:spcPts val="500"/>
-              </a:spcAft>
-              <a:defRPr sz="1500" b="0" i="1">
-                <a:solidFill>
-                  <a:srgbClr val="D8B4FE"/>
-                </a:solidFill>
-                <a:latin typeface="Georgia"/>
-              </a:defRPr>
-            </a:pPr>
-            <a:r>
-              <a:t>Below: World English Bible (WEB) fallback — verify NABRE on bible.usccb.org.</a:t>
-            </a:r>
-          </a:p>
-        </p:txBody>
-      </p:sp>
-      <p:sp>
-        <p:nvSpPr>
-          <p:cNvPr id="5" name="TextBox 4"/>
-          <p:cNvSpPr txBox="1"/>
-          <p:nvPr/>
-        </p:nvSpPr>
-        <p:spPr>
-          <a:xfrm>
-            <a:off x="914400" y="9418320"/>
-            <a:ext cx="16459200" cy="777240"/>
-          </a:xfrm>
-          <a:prstGeom prst="rect">
-            <a:avLst/>
-          </a:prstGeom>
-          <a:noFill/>
-        </p:spPr>
-        <p:txBody>
-          <a:bodyPr wrap="square" lIns="109728" rIns="109728" tIns="73152" bIns="73152">
-            <a:noAutofit/>
-          </a:bodyPr>
-          <a:lstStyle/>
-          <a:p>
-            <a:pPr>
-              <a:defRPr sz="1300" b="1" i="0">
-                <a:solidFill>
-                  <a:srgbClr val="F8C66A"/>
-                </a:solidFill>
-                <a:latin typeface="Georgia"/>
-              </a:defRPr>
-            </a:pPr>
-            <a:r>
-              <a:t>Gwangju Filipino Catholic Community</a:t>
-            </a:r>
-          </a:p>
-          <a:p>
-            <a:pPr>
-              <a:spcBef>
-                <a:spcPts val="200"/>
-              </a:spcBef>
-              <a:defRPr sz="1200" b="0" i="0">
-                <a:solidFill>
-                  <a:srgbClr val="D8B4FE"/>
-                </a:solidFill>
-                <a:latin typeface="Georgia"/>
-              </a:defRPr>
-            </a:pPr>
-            <a:r>
-              <a:t>Scripture note</a:t>
             </a:r>
           </a:p>
         </p:txBody>
